--- a/output_pptx/Blessed_Be_Your_Name.pptx
+++ b/output_pptx/Blessed_Be_Your_Name.pptx
@@ -3124,8 +3124,8 @@
         </p:nvSpPr>
         <p:spPr>
           <a:xfrm>
-            <a:off x="594360" y="2258568"/>
-            <a:ext cx="11002975" cy="685800"/>
+            <a:off x="640080" y="2052828"/>
+            <a:ext cx="10911535" cy="731520"/>
           </a:xfrm>
           <a:prstGeom prst="rect">
             <a:avLst/>
@@ -3140,7 +3140,7 @@
           <a:p>
             <a:pPr algn="ctr"/>
             <a:r>
-              <a:rPr sz="4400" b="1" i="0">
+              <a:rPr sz="4800" b="1" i="0">
                 <a:solidFill>
                   <a:srgbClr val="FFFFFF"/>
                 </a:solidFill>
@@ -3159,8 +3159,8 @@
         </p:nvSpPr>
         <p:spPr>
           <a:xfrm>
-            <a:off x="594360" y="2980944"/>
-            <a:ext cx="11002975" cy="347472"/>
+            <a:off x="640080" y="2985516"/>
+            <a:ext cx="10911535" cy="731520"/>
           </a:xfrm>
           <a:prstGeom prst="rect">
             <a:avLst/>
@@ -3175,83 +3175,13 @@
           <a:p>
             <a:pPr algn="ctr"/>
             <a:r>
-              <a:rPr sz="2200" b="0" i="1">
-                <a:solidFill>
-                  <a:srgbClr val="8C8C8C"/>
-                </a:solidFill>
-                <a:latin typeface="Arial"/>
-              </a:rPr>
-              <a:t/>
-            </a:r>
-          </a:p>
-        </p:txBody>
-      </p:sp>
-      <p:sp>
-        <p:nvSpPr>
-          <p:cNvPr id="4" name="TextBox 3"/>
-          <p:cNvSpPr txBox="1"/>
-          <p:nvPr/>
-        </p:nvSpPr>
-        <p:spPr>
-          <a:xfrm>
-            <a:off x="594360" y="3529584"/>
-            <a:ext cx="11002975" cy="685800"/>
-          </a:xfrm>
-          <a:prstGeom prst="rect">
-            <a:avLst/>
-          </a:prstGeom>
-          <a:noFill/>
-        </p:spPr>
-        <p:txBody>
-          <a:bodyPr wrap="square">
-            <a:spAutoFit/>
-          </a:bodyPr>
-          <a:lstStyle/>
-          <a:p>
-            <a:pPr algn="ctr"/>
-            <a:r>
-              <a:rPr sz="4400" b="1" i="0">
+              <a:rPr sz="4800" b="1" i="0">
                 <a:solidFill>
                   <a:srgbClr val="FFFFFF"/>
                 </a:solidFill>
                 <a:latin typeface="Arial"/>
               </a:rPr>
               <a:t>Bendito seja o Teu nome</a:t>
-            </a:r>
-          </a:p>
-        </p:txBody>
-      </p:sp>
-      <p:sp>
-        <p:nvSpPr>
-          <p:cNvPr id="5" name="TextBox 4"/>
-          <p:cNvSpPr txBox="1"/>
-          <p:nvPr/>
-        </p:nvSpPr>
-        <p:spPr>
-          <a:xfrm>
-            <a:off x="594360" y="4251960"/>
-            <a:ext cx="11002975" cy="347472"/>
-          </a:xfrm>
-          <a:prstGeom prst="rect">
-            <a:avLst/>
-          </a:prstGeom>
-          <a:noFill/>
-        </p:spPr>
-        <p:txBody>
-          <a:bodyPr wrap="square">
-            <a:spAutoFit/>
-          </a:bodyPr>
-          <a:lstStyle/>
-          <a:p>
-            <a:pPr algn="ctr"/>
-            <a:r>
-              <a:rPr sz="2200" b="0" i="1">
-                <a:solidFill>
-                  <a:srgbClr val="8C8C8C"/>
-                </a:solidFill>
-                <a:latin typeface="Arial"/>
-              </a:rPr>
-              <a:t/>
             </a:r>
           </a:p>
         </p:txBody>
@@ -3290,8 +3220,8 @@
         </p:nvSpPr>
         <p:spPr>
           <a:xfrm>
-            <a:off x="594360" y="2258568"/>
-            <a:ext cx="11002975" cy="685800"/>
+            <a:off x="640080" y="2052828"/>
+            <a:ext cx="10911535" cy="731520"/>
           </a:xfrm>
           <a:prstGeom prst="rect">
             <a:avLst/>
@@ -3306,7 +3236,7 @@
           <a:p>
             <a:pPr algn="ctr"/>
             <a:r>
-              <a:rPr sz="4400" b="1" i="0">
+              <a:rPr sz="4800" b="1" i="0">
                 <a:solidFill>
                   <a:srgbClr val="FFFFFF"/>
                 </a:solidFill>
@@ -3325,8 +3255,8 @@
         </p:nvSpPr>
         <p:spPr>
           <a:xfrm>
-            <a:off x="594360" y="2980944"/>
-            <a:ext cx="11002975" cy="347472"/>
+            <a:off x="640080" y="2985516"/>
+            <a:ext cx="10911535" cy="731520"/>
           </a:xfrm>
           <a:prstGeom prst="rect">
             <a:avLst/>
@@ -3341,83 +3271,13 @@
           <a:p>
             <a:pPr algn="ctr"/>
             <a:r>
-              <a:rPr sz="2200" b="0" i="1">
-                <a:solidFill>
-                  <a:srgbClr val="8C8C8C"/>
-                </a:solidFill>
-                <a:latin typeface="Arial"/>
-              </a:rPr>
-              <a:t/>
-            </a:r>
-          </a:p>
-        </p:txBody>
-      </p:sp>
-      <p:sp>
-        <p:nvSpPr>
-          <p:cNvPr id="4" name="TextBox 3"/>
-          <p:cNvSpPr txBox="1"/>
-          <p:nvPr/>
-        </p:nvSpPr>
-        <p:spPr>
-          <a:xfrm>
-            <a:off x="594360" y="3529584"/>
-            <a:ext cx="11002975" cy="685800"/>
-          </a:xfrm>
-          <a:prstGeom prst="rect">
-            <a:avLst/>
-          </a:prstGeom>
-          <a:noFill/>
-        </p:spPr>
-        <p:txBody>
-          <a:bodyPr wrap="square">
-            <a:spAutoFit/>
-          </a:bodyPr>
-          <a:lstStyle/>
-          <a:p>
-            <a:pPr algn="ctr"/>
-            <a:r>
-              <a:rPr sz="4400" b="1" i="0">
+              <a:rPr sz="4800" b="1" i="0">
                 <a:solidFill>
                   <a:srgbClr val="FFFFFF"/>
                 </a:solidFill>
                 <a:latin typeface="Arial"/>
               </a:rPr>
               <a:t>Bendito seja o Teu nome</a:t>
-            </a:r>
-          </a:p>
-        </p:txBody>
-      </p:sp>
-      <p:sp>
-        <p:nvSpPr>
-          <p:cNvPr id="5" name="TextBox 4"/>
-          <p:cNvSpPr txBox="1"/>
-          <p:nvPr/>
-        </p:nvSpPr>
-        <p:spPr>
-          <a:xfrm>
-            <a:off x="594360" y="4251960"/>
-            <a:ext cx="11002975" cy="347472"/>
-          </a:xfrm>
-          <a:prstGeom prst="rect">
-            <a:avLst/>
-          </a:prstGeom>
-          <a:noFill/>
-        </p:spPr>
-        <p:txBody>
-          <a:bodyPr wrap="square">
-            <a:spAutoFit/>
-          </a:bodyPr>
-          <a:lstStyle/>
-          <a:p>
-            <a:pPr algn="ctr"/>
-            <a:r>
-              <a:rPr sz="2200" b="0" i="1">
-                <a:solidFill>
-                  <a:srgbClr val="8C8C8C"/>
-                </a:solidFill>
-                <a:latin typeface="Arial"/>
-              </a:rPr>
-              <a:t/>
             </a:r>
           </a:p>
         </p:txBody>
@@ -3456,8 +3316,8 @@
         </p:nvSpPr>
         <p:spPr>
           <a:xfrm>
-            <a:off x="594360" y="1837944"/>
-            <a:ext cx="11002975" cy="685800"/>
+            <a:off x="640080" y="1650492"/>
+            <a:ext cx="10911535" cy="731520"/>
           </a:xfrm>
           <a:prstGeom prst="rect">
             <a:avLst/>
@@ -3472,7 +3332,7 @@
           <a:p>
             <a:pPr algn="ctr"/>
             <a:r>
-              <a:rPr sz="4400" b="1" i="0">
+              <a:rPr sz="4800" b="1" i="0">
                 <a:solidFill>
                   <a:srgbClr val="FFFFFF"/>
                 </a:solidFill>
@@ -3491,8 +3351,8 @@
         </p:nvSpPr>
         <p:spPr>
           <a:xfrm>
-            <a:off x="594360" y="2560320"/>
-            <a:ext cx="11002975" cy="384048"/>
+            <a:off x="640080" y="2418588"/>
+            <a:ext cx="10911535" cy="365760"/>
           </a:xfrm>
           <a:prstGeom prst="rect">
             <a:avLst/>
@@ -3509,7 +3369,7 @@
             <a:r>
               <a:rPr sz="2400" b="0" i="1">
                 <a:solidFill>
-                  <a:srgbClr val="B4B4B4"/>
+                  <a:srgbClr val="AAAAAA"/>
                 </a:solidFill>
                 <a:latin typeface="Arial"/>
               </a:rPr>
@@ -3526,8 +3386,8 @@
         </p:nvSpPr>
         <p:spPr>
           <a:xfrm>
-            <a:off x="594360" y="2980944"/>
-            <a:ext cx="11002975" cy="347472"/>
+            <a:off x="640080" y="2985516"/>
+            <a:ext cx="10911535" cy="731520"/>
           </a:xfrm>
           <a:prstGeom prst="rect">
             <a:avLst/>
@@ -3542,13 +3402,13 @@
           <a:p>
             <a:pPr algn="ctr"/>
             <a:r>
-              <a:rPr sz="2000" b="0" i="1">
-                <a:solidFill>
-                  <a:srgbClr val="8C8C8C"/>
+              <a:rPr sz="4800" b="1" i="0">
+                <a:solidFill>
+                  <a:srgbClr val="FFFFFF"/>
                 </a:solidFill>
                 <a:latin typeface="Arial"/>
               </a:rPr>
-              <a:t/>
+              <a:t>全地にあふれる   その恵み</a:t>
             </a:r>
           </a:p>
         </p:txBody>
@@ -3561,8 +3421,8 @@
         </p:nvSpPr>
         <p:spPr>
           <a:xfrm>
-            <a:off x="594360" y="3529584"/>
-            <a:ext cx="11002975" cy="685800"/>
+            <a:off x="640080" y="3753612"/>
+            <a:ext cx="10911535" cy="365760"/>
           </a:xfrm>
           <a:prstGeom prst="rect">
             <a:avLst/>
@@ -3577,13 +3437,13 @@
           <a:p>
             <a:pPr algn="ctr"/>
             <a:r>
-              <a:rPr sz="4400" b="1" i="0">
-                <a:solidFill>
-                  <a:srgbClr val="FFFFFF"/>
+              <a:rPr sz="2400" b="0" i="1">
+                <a:solidFill>
+                  <a:srgbClr val="AAAAAA"/>
                 </a:solidFill>
                 <a:latin typeface="Arial"/>
               </a:rPr>
-              <a:t>全地にあふれる   その恵み</a:t>
+              <a:t>zenchi ni afureru sono megumi</a:t>
             </a:r>
           </a:p>
         </p:txBody>
@@ -3596,8 +3456,8 @@
         </p:nvSpPr>
         <p:spPr>
           <a:xfrm>
-            <a:off x="594360" y="4251960"/>
-            <a:ext cx="11002975" cy="384048"/>
+            <a:off x="640080" y="4530852"/>
+            <a:ext cx="10911535" cy="310896"/>
           </a:xfrm>
           <a:prstGeom prst="rect">
             <a:avLst/>
@@ -3612,13 +3472,13 @@
           <a:p>
             <a:pPr algn="ctr"/>
             <a:r>
-              <a:rPr sz="2400" b="0" i="1">
-                <a:solidFill>
-                  <a:srgbClr val="B4B4B4"/>
+              <a:rPr sz="2000" b="0" i="1">
+                <a:solidFill>
+                  <a:srgbClr val="828282"/>
                 </a:solidFill>
                 <a:latin typeface="Arial"/>
               </a:rPr>
-              <a:t>zenchi ni afureru sono megumi</a:t>
+              <a:t>Bendito Seja o Teu Nome</a:t>
             </a:r>
           </a:p>
         </p:txBody>
@@ -3631,8 +3491,8 @@
         </p:nvSpPr>
         <p:spPr>
           <a:xfrm>
-            <a:off x="594360" y="4672584"/>
-            <a:ext cx="11002975" cy="347472"/>
+            <a:off x="640080" y="4896612"/>
+            <a:ext cx="10911535" cy="310896"/>
           </a:xfrm>
           <a:prstGeom prst="rect">
             <a:avLst/>
@@ -3649,11 +3509,11 @@
             <a:r>
               <a:rPr sz="2000" b="0" i="1">
                 <a:solidFill>
-                  <a:srgbClr val="8C8C8C"/>
+                  <a:srgbClr val="828282"/>
                 </a:solidFill>
                 <a:latin typeface="Arial"/>
               </a:rPr>
-              <a:t/>
+              <a:t>Bendito seja o Teu nome</a:t>
             </a:r>
           </a:p>
         </p:txBody>
@@ -3692,8 +3552,8 @@
         </p:nvSpPr>
         <p:spPr>
           <a:xfrm>
-            <a:off x="594360" y="1837944"/>
-            <a:ext cx="11002975" cy="685800"/>
+            <a:off x="640080" y="1650492"/>
+            <a:ext cx="10911535" cy="731520"/>
           </a:xfrm>
           <a:prstGeom prst="rect">
             <a:avLst/>
@@ -3708,7 +3568,7 @@
           <a:p>
             <a:pPr algn="ctr"/>
             <a:r>
-              <a:rPr sz="4400" b="1" i="0">
+              <a:rPr sz="4800" b="1" i="0">
                 <a:solidFill>
                   <a:srgbClr val="FFFFFF"/>
                 </a:solidFill>
@@ -3727,8 +3587,8 @@
         </p:nvSpPr>
         <p:spPr>
           <a:xfrm>
-            <a:off x="594360" y="2560320"/>
-            <a:ext cx="11002975" cy="384048"/>
+            <a:off x="640080" y="2418588"/>
+            <a:ext cx="10911535" cy="365760"/>
           </a:xfrm>
           <a:prstGeom prst="rect">
             <a:avLst/>
@@ -3745,7 +3605,7 @@
             <a:r>
               <a:rPr sz="2400" b="0" i="1">
                 <a:solidFill>
-                  <a:srgbClr val="B4B4B4"/>
+                  <a:srgbClr val="AAAAAA"/>
                 </a:solidFill>
                 <a:latin typeface="Arial"/>
               </a:rPr>
@@ -3762,8 +3622,8 @@
         </p:nvSpPr>
         <p:spPr>
           <a:xfrm>
-            <a:off x="594360" y="2980944"/>
-            <a:ext cx="11002975" cy="347472"/>
+            <a:off x="640080" y="2985516"/>
+            <a:ext cx="10911535" cy="731520"/>
           </a:xfrm>
           <a:prstGeom prst="rect">
             <a:avLst/>
@@ -3778,13 +3638,13 @@
           <a:p>
             <a:pPr algn="ctr"/>
             <a:r>
-              <a:rPr sz="2000" b="0" i="1">
-                <a:solidFill>
-                  <a:srgbClr val="8C8C8C"/>
+              <a:rPr sz="4800" b="1" i="0">
+                <a:solidFill>
+                  <a:srgbClr val="FFFFFF"/>
                 </a:solidFill>
                 <a:latin typeface="Arial"/>
               </a:rPr>
-              <a:t/>
+              <a:t>荒野の道を   進むときも</a:t>
             </a:r>
           </a:p>
         </p:txBody>
@@ -3797,8 +3657,8 @@
         </p:nvSpPr>
         <p:spPr>
           <a:xfrm>
-            <a:off x="594360" y="3529584"/>
-            <a:ext cx="11002975" cy="685800"/>
+            <a:off x="640080" y="3753612"/>
+            <a:ext cx="10911535" cy="365760"/>
           </a:xfrm>
           <a:prstGeom prst="rect">
             <a:avLst/>
@@ -3813,13 +3673,13 @@
           <a:p>
             <a:pPr algn="ctr"/>
             <a:r>
-              <a:rPr sz="4400" b="1" i="0">
-                <a:solidFill>
-                  <a:srgbClr val="FFFFFF"/>
+              <a:rPr sz="2400" b="0" i="1">
+                <a:solidFill>
+                  <a:srgbClr val="AAAAAA"/>
                 </a:solidFill>
                 <a:latin typeface="Arial"/>
               </a:rPr>
-              <a:t>荒野の道を   進むときも</a:t>
+              <a:t>arano no michi wo susumu toki mo</a:t>
             </a:r>
           </a:p>
         </p:txBody>
@@ -3832,8 +3692,8 @@
         </p:nvSpPr>
         <p:spPr>
           <a:xfrm>
-            <a:off x="594360" y="4251960"/>
-            <a:ext cx="11002975" cy="384048"/>
+            <a:off x="640080" y="4530852"/>
+            <a:ext cx="10911535" cy="310896"/>
           </a:xfrm>
           <a:prstGeom prst="rect">
             <a:avLst/>
@@ -3848,13 +3708,13 @@
           <a:p>
             <a:pPr algn="ctr"/>
             <a:r>
-              <a:rPr sz="2400" b="0" i="1">
-                <a:solidFill>
-                  <a:srgbClr val="B4B4B4"/>
+              <a:rPr sz="2000" b="0" i="1">
+                <a:solidFill>
+                  <a:srgbClr val="828282"/>
                 </a:solidFill>
                 <a:latin typeface="Arial"/>
               </a:rPr>
-              <a:t>arano no michi wo susumu toki mo</a:t>
+              <a:t>Na terra que é abundante</a:t>
             </a:r>
           </a:p>
         </p:txBody>
@@ -3867,8 +3727,8 @@
         </p:nvSpPr>
         <p:spPr>
           <a:xfrm>
-            <a:off x="594360" y="4672584"/>
-            <a:ext cx="11002975" cy="347472"/>
+            <a:off x="640080" y="4896612"/>
+            <a:ext cx="10911535" cy="310896"/>
           </a:xfrm>
           <a:prstGeom prst="rect">
             <a:avLst/>
@@ -3885,11 +3745,11 @@
             <a:r>
               <a:rPr sz="2000" b="0" i="1">
                 <a:solidFill>
-                  <a:srgbClr val="8C8C8C"/>
+                  <a:srgbClr val="828282"/>
                 </a:solidFill>
                 <a:latin typeface="Arial"/>
               </a:rPr>
-              <a:t/>
+              <a:t>Onde fluem Tuas correntes de abundância</a:t>
             </a:r>
           </a:p>
         </p:txBody>
@@ -3928,8 +3788,8 @@
         </p:nvSpPr>
         <p:spPr>
           <a:xfrm>
-            <a:off x="594360" y="1837944"/>
-            <a:ext cx="11002975" cy="685800"/>
+            <a:off x="640080" y="1650492"/>
+            <a:ext cx="10911535" cy="731520"/>
           </a:xfrm>
           <a:prstGeom prst="rect">
             <a:avLst/>
@@ -3944,7 +3804,7 @@
           <a:p>
             <a:pPr algn="ctr"/>
             <a:r>
-              <a:rPr sz="4400" b="1" i="0">
+              <a:rPr sz="4800" b="1" i="0">
                 <a:solidFill>
                   <a:srgbClr val="FFFFFF"/>
                 </a:solidFill>
@@ -3963,8 +3823,8 @@
         </p:nvSpPr>
         <p:spPr>
           <a:xfrm>
-            <a:off x="594360" y="2560320"/>
-            <a:ext cx="11002975" cy="384048"/>
+            <a:off x="640080" y="2418588"/>
+            <a:ext cx="10911535" cy="365760"/>
           </a:xfrm>
           <a:prstGeom prst="rect">
             <a:avLst/>
@@ -3981,7 +3841,7 @@
             <a:r>
               <a:rPr sz="2400" b="0" i="1">
                 <a:solidFill>
-                  <a:srgbClr val="B4B4B4"/>
+                  <a:srgbClr val="AAAAAA"/>
                 </a:solidFill>
                 <a:latin typeface="Arial"/>
               </a:rPr>
@@ -3998,8 +3858,8 @@
         </p:nvSpPr>
         <p:spPr>
           <a:xfrm>
-            <a:off x="594360" y="2980944"/>
-            <a:ext cx="11002975" cy="347472"/>
+            <a:off x="640080" y="2985516"/>
+            <a:ext cx="10911535" cy="731520"/>
           </a:xfrm>
           <a:prstGeom prst="rect">
             <a:avLst/>
@@ -4014,13 +3874,13 @@
           <a:p>
             <a:pPr algn="ctr"/>
             <a:r>
-              <a:rPr sz="2000" b="0" i="1">
-                <a:solidFill>
-                  <a:srgbClr val="8C8C8C"/>
+              <a:rPr sz="4800" b="1" i="0">
+                <a:solidFill>
+                  <a:srgbClr val="FFFFFF"/>
                 </a:solidFill>
                 <a:latin typeface="Arial"/>
               </a:rPr>
-              <a:t/>
+              <a:t>暗闇の時にさえ       歌い続けよう</a:t>
             </a:r>
           </a:p>
         </p:txBody>
@@ -4033,8 +3893,8 @@
         </p:nvSpPr>
         <p:spPr>
           <a:xfrm>
-            <a:off x="594360" y="3529584"/>
-            <a:ext cx="11002975" cy="685800"/>
+            <a:off x="640080" y="3753612"/>
+            <a:ext cx="10911535" cy="365760"/>
           </a:xfrm>
           <a:prstGeom prst="rect">
             <a:avLst/>
@@ -4049,13 +3909,13 @@
           <a:p>
             <a:pPr algn="ctr"/>
             <a:r>
-              <a:rPr sz="4400" b="1" i="0">
-                <a:solidFill>
-                  <a:srgbClr val="FFFFFF"/>
+              <a:rPr sz="2400" b="0" i="1">
+                <a:solidFill>
+                  <a:srgbClr val="AAAAAA"/>
                 </a:solidFill>
                 <a:latin typeface="Arial"/>
               </a:rPr>
-              <a:t>暗闇の時にさえ       歌い続けよう</a:t>
+              <a:t>kurayami no toki ni sae utaitsuzukeyou</a:t>
             </a:r>
           </a:p>
         </p:txBody>
@@ -4068,8 +3928,8 @@
         </p:nvSpPr>
         <p:spPr>
           <a:xfrm>
-            <a:off x="594360" y="4251960"/>
-            <a:ext cx="11002975" cy="384048"/>
+            <a:off x="640080" y="4530852"/>
+            <a:ext cx="10911535" cy="310896"/>
           </a:xfrm>
           <a:prstGeom prst="rect">
             <a:avLst/>
@@ -4084,13 +3944,13 @@
           <a:p>
             <a:pPr algn="ctr"/>
             <a:r>
-              <a:rPr sz="2400" b="0" i="1">
-                <a:solidFill>
-                  <a:srgbClr val="B4B4B4"/>
+              <a:rPr sz="2000" b="0" i="1">
+                <a:solidFill>
+                  <a:srgbClr val="828282"/>
                 </a:solidFill>
                 <a:latin typeface="Arial"/>
               </a:rPr>
-              <a:t>kurayami no toki ni sae utaitsuzukeyou</a:t>
+              <a:t>Bendito seja o Teu nome</a:t>
             </a:r>
           </a:p>
         </p:txBody>
@@ -4103,8 +3963,8 @@
         </p:nvSpPr>
         <p:spPr>
           <a:xfrm>
-            <a:off x="594360" y="4672584"/>
-            <a:ext cx="11002975" cy="347472"/>
+            <a:off x="640080" y="4896612"/>
+            <a:ext cx="10911535" cy="310896"/>
           </a:xfrm>
           <a:prstGeom prst="rect">
             <a:avLst/>
@@ -4121,11 +3981,11 @@
             <a:r>
               <a:rPr sz="2000" b="0" i="1">
                 <a:solidFill>
-                  <a:srgbClr val="8C8C8C"/>
+                  <a:srgbClr val="828282"/>
                 </a:solidFill>
                 <a:latin typeface="Arial"/>
               </a:rPr>
-              <a:t/>
+              <a:t>Toda bênção que Tu derramardes</a:t>
             </a:r>
           </a:p>
         </p:txBody>
@@ -4164,8 +4024,8 @@
         </p:nvSpPr>
         <p:spPr>
           <a:xfrm>
-            <a:off x="594360" y="1837944"/>
-            <a:ext cx="11002975" cy="685800"/>
+            <a:off x="640080" y="1650492"/>
+            <a:ext cx="10911535" cy="731520"/>
           </a:xfrm>
           <a:prstGeom prst="rect">
             <a:avLst/>
@@ -4180,7 +4040,7 @@
           <a:p>
             <a:pPr algn="ctr"/>
             <a:r>
-              <a:rPr sz="4400" b="1" i="0">
+              <a:rPr sz="4800" b="1" i="0">
                 <a:solidFill>
                   <a:srgbClr val="FFFFFF"/>
                 </a:solidFill>
@@ -4199,8 +4059,8 @@
         </p:nvSpPr>
         <p:spPr>
           <a:xfrm>
-            <a:off x="594360" y="2560320"/>
-            <a:ext cx="11002975" cy="384048"/>
+            <a:off x="640080" y="2418588"/>
+            <a:ext cx="10911535" cy="365760"/>
           </a:xfrm>
           <a:prstGeom prst="rect">
             <a:avLst/>
@@ -4217,7 +4077,7 @@
             <a:r>
               <a:rPr sz="2400" b="0" i="1">
                 <a:solidFill>
-                  <a:srgbClr val="B4B4B4"/>
+                  <a:srgbClr val="AAAAAA"/>
                 </a:solidFill>
                 <a:latin typeface="Arial"/>
               </a:rPr>
@@ -4234,8 +4094,8 @@
         </p:nvSpPr>
         <p:spPr>
           <a:xfrm>
-            <a:off x="594360" y="2980944"/>
-            <a:ext cx="11002975" cy="347472"/>
+            <a:off x="640080" y="2985516"/>
+            <a:ext cx="10911535" cy="731520"/>
           </a:xfrm>
           <a:prstGeom prst="rect">
             <a:avLst/>
@@ -4250,13 +4110,13 @@
           <a:p>
             <a:pPr algn="ctr"/>
             <a:r>
-              <a:rPr sz="2000" b="0" i="1">
-                <a:solidFill>
-                  <a:srgbClr val="8C8C8C"/>
+              <a:rPr sz="4800" b="1" i="0">
+                <a:solidFill>
+                  <a:srgbClr val="FFFFFF"/>
                 </a:solidFill>
                 <a:latin typeface="Arial"/>
               </a:rPr>
-              <a:t/>
+              <a:t>主の御名をほめよ     栄光ある主の御名</a:t>
             </a:r>
           </a:p>
         </p:txBody>
@@ -4269,8 +4129,8 @@
         </p:nvSpPr>
         <p:spPr>
           <a:xfrm>
-            <a:off x="594360" y="3529584"/>
-            <a:ext cx="11002975" cy="685800"/>
+            <a:off x="640080" y="3753612"/>
+            <a:ext cx="10911535" cy="365760"/>
           </a:xfrm>
           <a:prstGeom prst="rect">
             <a:avLst/>
@@ -4285,13 +4145,13 @@
           <a:p>
             <a:pPr algn="ctr"/>
             <a:r>
-              <a:rPr sz="4400" b="1" i="0">
-                <a:solidFill>
-                  <a:srgbClr val="FFFFFF"/>
+              <a:rPr sz="2400" b="0" i="1">
+                <a:solidFill>
+                  <a:srgbClr val="AAAAAA"/>
                 </a:solidFill>
                 <a:latin typeface="Arial"/>
               </a:rPr>
-              <a:t>主の御名をほめよ     栄光ある主の御名</a:t>
+              <a:t>shu no mina wo homeyo  eikou aru shu no mina</a:t>
             </a:r>
           </a:p>
         </p:txBody>
@@ -4304,8 +4164,8 @@
         </p:nvSpPr>
         <p:spPr>
           <a:xfrm>
-            <a:off x="594360" y="4251960"/>
-            <a:ext cx="11002975" cy="384048"/>
+            <a:off x="640080" y="4530852"/>
+            <a:ext cx="10911535" cy="310896"/>
           </a:xfrm>
           <a:prstGeom prst="rect">
             <a:avLst/>
@@ -4320,13 +4180,13 @@
           <a:p>
             <a:pPr algn="ctr"/>
             <a:r>
-              <a:rPr sz="2290" b="0" i="1">
-                <a:solidFill>
-                  <a:srgbClr val="B4B4B4"/>
+              <a:rPr sz="2000" b="0" i="1">
+                <a:solidFill>
+                  <a:srgbClr val="828282"/>
                 </a:solidFill>
                 <a:latin typeface="Arial"/>
               </a:rPr>
-              <a:t>shu no mina wo homeyo  eikou aru shu no mina</a:t>
+              <a:t>Ainda direi</a:t>
             </a:r>
           </a:p>
         </p:txBody>
@@ -4339,8 +4199,8 @@
         </p:nvSpPr>
         <p:spPr>
           <a:xfrm>
-            <a:off x="594360" y="4672584"/>
-            <a:ext cx="11002975" cy="347472"/>
+            <a:off x="640080" y="4896612"/>
+            <a:ext cx="10911535" cy="310896"/>
           </a:xfrm>
           <a:prstGeom prst="rect">
             <a:avLst/>
@@ -4357,11 +4217,11 @@
             <a:r>
               <a:rPr sz="2000" b="0" i="1">
                 <a:solidFill>
-                  <a:srgbClr val="8C8C8C"/>
+                  <a:srgbClr val="828282"/>
                 </a:solidFill>
                 <a:latin typeface="Arial"/>
               </a:rPr>
-              <a:t/>
+              <a:t>Bendito seja o nome do Senhor</a:t>
             </a:r>
           </a:p>
         </p:txBody>
@@ -4400,8 +4260,8 @@
         </p:nvSpPr>
         <p:spPr>
           <a:xfrm>
-            <a:off x="594360" y="2258568"/>
-            <a:ext cx="11002975" cy="685800"/>
+            <a:off x="640080" y="2052828"/>
+            <a:ext cx="10911535" cy="731520"/>
           </a:xfrm>
           <a:prstGeom prst="rect">
             <a:avLst/>
@@ -4416,7 +4276,7 @@
           <a:p>
             <a:pPr algn="ctr"/>
             <a:r>
-              <a:rPr sz="4400" b="1" i="0">
+              <a:rPr sz="4800" b="1" i="0">
                 <a:solidFill>
                   <a:srgbClr val="FFFFFF"/>
                 </a:solidFill>
@@ -4435,8 +4295,8 @@
         </p:nvSpPr>
         <p:spPr>
           <a:xfrm>
-            <a:off x="594360" y="2980944"/>
-            <a:ext cx="11002975" cy="347472"/>
+            <a:off x="640080" y="2985516"/>
+            <a:ext cx="10911535" cy="731520"/>
           </a:xfrm>
           <a:prstGeom prst="rect">
             <a:avLst/>
@@ -4451,83 +4311,13 @@
           <a:p>
             <a:pPr algn="ctr"/>
             <a:r>
-              <a:rPr sz="2200" b="0" i="1">
-                <a:solidFill>
-                  <a:srgbClr val="8C8C8C"/>
-                </a:solidFill>
-                <a:latin typeface="Arial"/>
-              </a:rPr>
-              <a:t/>
-            </a:r>
-          </a:p>
-        </p:txBody>
-      </p:sp>
-      <p:sp>
-        <p:nvSpPr>
-          <p:cNvPr id="4" name="TextBox 3"/>
-          <p:cNvSpPr txBox="1"/>
-          <p:nvPr/>
-        </p:nvSpPr>
-        <p:spPr>
-          <a:xfrm>
-            <a:off x="594360" y="3529584"/>
-            <a:ext cx="11002975" cy="685800"/>
-          </a:xfrm>
-          <a:prstGeom prst="rect">
-            <a:avLst/>
-          </a:prstGeom>
-          <a:noFill/>
-        </p:spPr>
-        <p:txBody>
-          <a:bodyPr wrap="square">
-            <a:spAutoFit/>
-          </a:bodyPr>
-          <a:lstStyle/>
-          <a:p>
-            <a:pPr algn="ctr"/>
-            <a:r>
-              <a:rPr sz="4400" b="1" i="0">
+              <a:rPr sz="4800" b="1" i="0">
                 <a:solidFill>
                   <a:srgbClr val="FFFFFF"/>
                 </a:solidFill>
                 <a:latin typeface="Arial"/>
               </a:rPr>
               <a:t>Tu dás e Tu tiras</a:t>
-            </a:r>
-          </a:p>
-        </p:txBody>
-      </p:sp>
-      <p:sp>
-        <p:nvSpPr>
-          <p:cNvPr id="5" name="TextBox 4"/>
-          <p:cNvSpPr txBox="1"/>
-          <p:nvPr/>
-        </p:nvSpPr>
-        <p:spPr>
-          <a:xfrm>
-            <a:off x="594360" y="4251960"/>
-            <a:ext cx="11002975" cy="347472"/>
-          </a:xfrm>
-          <a:prstGeom prst="rect">
-            <a:avLst/>
-          </a:prstGeom>
-          <a:noFill/>
-        </p:spPr>
-        <p:txBody>
-          <a:bodyPr wrap="square">
-            <a:spAutoFit/>
-          </a:bodyPr>
-          <a:lstStyle/>
-          <a:p>
-            <a:pPr algn="ctr"/>
-            <a:r>
-              <a:rPr sz="2200" b="0" i="1">
-                <a:solidFill>
-                  <a:srgbClr val="8C8C8C"/>
-                </a:solidFill>
-                <a:latin typeface="Arial"/>
-              </a:rPr>
-              <a:t/>
             </a:r>
           </a:p>
         </p:txBody>
@@ -4566,8 +4356,8 @@
         </p:nvSpPr>
         <p:spPr>
           <a:xfrm>
-            <a:off x="594360" y="2258568"/>
-            <a:ext cx="11002975" cy="685800"/>
+            <a:off x="640080" y="2052828"/>
+            <a:ext cx="10911535" cy="731520"/>
           </a:xfrm>
           <a:prstGeom prst="rect">
             <a:avLst/>
@@ -4582,7 +4372,7 @@
           <a:p>
             <a:pPr algn="ctr"/>
             <a:r>
-              <a:rPr sz="4400" b="1" i="0">
+              <a:rPr sz="4800" b="1" i="0">
                 <a:solidFill>
                   <a:srgbClr val="FFFFFF"/>
                 </a:solidFill>
@@ -4601,8 +4391,8 @@
         </p:nvSpPr>
         <p:spPr>
           <a:xfrm>
-            <a:off x="594360" y="2980944"/>
-            <a:ext cx="11002975" cy="347472"/>
+            <a:off x="640080" y="2985516"/>
+            <a:ext cx="10911535" cy="731520"/>
           </a:xfrm>
           <a:prstGeom prst="rect">
             <a:avLst/>
@@ -4617,83 +4407,13 @@
           <a:p>
             <a:pPr algn="ctr"/>
             <a:r>
-              <a:rPr sz="2200" b="0" i="1">
-                <a:solidFill>
-                  <a:srgbClr val="8C8C8C"/>
-                </a:solidFill>
-                <a:latin typeface="Arial"/>
-              </a:rPr>
-              <a:t/>
-            </a:r>
-          </a:p>
-        </p:txBody>
-      </p:sp>
-      <p:sp>
-        <p:nvSpPr>
-          <p:cNvPr id="4" name="TextBox 3"/>
-          <p:cNvSpPr txBox="1"/>
-          <p:nvPr/>
-        </p:nvSpPr>
-        <p:spPr>
-          <a:xfrm>
-            <a:off x="594360" y="3529584"/>
-            <a:ext cx="11002975" cy="685800"/>
-          </a:xfrm>
-          <a:prstGeom prst="rect">
-            <a:avLst/>
-          </a:prstGeom>
-          <a:noFill/>
-        </p:spPr>
-        <p:txBody>
-          <a:bodyPr wrap="square">
-            <a:spAutoFit/>
-          </a:bodyPr>
-          <a:lstStyle/>
-          <a:p>
-            <a:pPr algn="ctr"/>
-            <a:r>
-              <a:rPr sz="4400" b="1" i="0">
+              <a:rPr sz="4800" b="1" i="0">
                 <a:solidFill>
                   <a:srgbClr val="FFFFFF"/>
                 </a:solidFill>
                 <a:latin typeface="Arial"/>
               </a:rPr>
               <a:t>Meu coração escolherá dizer</a:t>
-            </a:r>
-          </a:p>
-        </p:txBody>
-      </p:sp>
-      <p:sp>
-        <p:nvSpPr>
-          <p:cNvPr id="5" name="TextBox 4"/>
-          <p:cNvSpPr txBox="1"/>
-          <p:nvPr/>
-        </p:nvSpPr>
-        <p:spPr>
-          <a:xfrm>
-            <a:off x="594360" y="4251960"/>
-            <a:ext cx="11002975" cy="347472"/>
-          </a:xfrm>
-          <a:prstGeom prst="rect">
-            <a:avLst/>
-          </a:prstGeom>
-          <a:noFill/>
-        </p:spPr>
-        <p:txBody>
-          <a:bodyPr wrap="square">
-            <a:spAutoFit/>
-          </a:bodyPr>
-          <a:lstStyle/>
-          <a:p>
-            <a:pPr algn="ctr"/>
-            <a:r>
-              <a:rPr sz="2200" b="0" i="1">
-                <a:solidFill>
-                  <a:srgbClr val="8C8C8C"/>
-                </a:solidFill>
-                <a:latin typeface="Arial"/>
-              </a:rPr>
-              <a:t/>
             </a:r>
           </a:p>
         </p:txBody>
@@ -4732,8 +4452,8 @@
         </p:nvSpPr>
         <p:spPr>
           <a:xfrm>
-            <a:off x="594360" y="2258568"/>
-            <a:ext cx="11002975" cy="685800"/>
+            <a:off x="640080" y="2052828"/>
+            <a:ext cx="10911535" cy="731520"/>
           </a:xfrm>
           <a:prstGeom prst="rect">
             <a:avLst/>
@@ -4748,7 +4468,7 @@
           <a:p>
             <a:pPr algn="ctr"/>
             <a:r>
-              <a:rPr sz="4400" b="1" i="0">
+              <a:rPr sz="4800" b="1" i="0">
                 <a:solidFill>
                   <a:srgbClr val="FFFFFF"/>
                 </a:solidFill>
@@ -4767,8 +4487,8 @@
         </p:nvSpPr>
         <p:spPr>
           <a:xfrm>
-            <a:off x="594360" y="2980944"/>
-            <a:ext cx="11002975" cy="347472"/>
+            <a:off x="640080" y="2985516"/>
+            <a:ext cx="10911535" cy="731520"/>
           </a:xfrm>
           <a:prstGeom prst="rect">
             <a:avLst/>
@@ -4783,83 +4503,13 @@
           <a:p>
             <a:pPr algn="ctr"/>
             <a:r>
-              <a:rPr sz="2200" b="0" i="1">
-                <a:solidFill>
-                  <a:srgbClr val="8C8C8C"/>
-                </a:solidFill>
-                <a:latin typeface="Arial"/>
-              </a:rPr>
-              <a:t/>
-            </a:r>
-          </a:p>
-        </p:txBody>
-      </p:sp>
-      <p:sp>
-        <p:nvSpPr>
-          <p:cNvPr id="4" name="TextBox 3"/>
-          <p:cNvSpPr txBox="1"/>
-          <p:nvPr/>
-        </p:nvSpPr>
-        <p:spPr>
-          <a:xfrm>
-            <a:off x="594360" y="3529584"/>
-            <a:ext cx="11002975" cy="685800"/>
-          </a:xfrm>
-          <a:prstGeom prst="rect">
-            <a:avLst/>
-          </a:prstGeom>
-          <a:noFill/>
-        </p:spPr>
-        <p:txBody>
-          <a:bodyPr wrap="square">
-            <a:spAutoFit/>
-          </a:bodyPr>
-          <a:lstStyle/>
-          <a:p>
-            <a:pPr algn="ctr"/>
-            <a:r>
-              <a:rPr sz="4400" b="1" i="0">
+              <a:rPr sz="4800" b="1" i="0">
                 <a:solidFill>
                   <a:srgbClr val="FFFFFF"/>
                 </a:solidFill>
                 <a:latin typeface="Arial"/>
               </a:rPr>
               <a:t>Bendito seja o nome do Senhor</a:t>
-            </a:r>
-          </a:p>
-        </p:txBody>
-      </p:sp>
-      <p:sp>
-        <p:nvSpPr>
-          <p:cNvPr id="5" name="TextBox 4"/>
-          <p:cNvSpPr txBox="1"/>
-          <p:nvPr/>
-        </p:nvSpPr>
-        <p:spPr>
-          <a:xfrm>
-            <a:off x="594360" y="4251960"/>
-            <a:ext cx="11002975" cy="347472"/>
-          </a:xfrm>
-          <a:prstGeom prst="rect">
-            <a:avLst/>
-          </a:prstGeom>
-          <a:noFill/>
-        </p:spPr>
-        <p:txBody>
-          <a:bodyPr wrap="square">
-            <a:spAutoFit/>
-          </a:bodyPr>
-          <a:lstStyle/>
-          <a:p>
-            <a:pPr algn="ctr"/>
-            <a:r>
-              <a:rPr sz="2200" b="0" i="1">
-                <a:solidFill>
-                  <a:srgbClr val="8C8C8C"/>
-                </a:solidFill>
-                <a:latin typeface="Arial"/>
-              </a:rPr>
-              <a:t/>
             </a:r>
           </a:p>
         </p:txBody>
@@ -4898,8 +4548,8 @@
         </p:nvSpPr>
         <p:spPr>
           <a:xfrm>
-            <a:off x="594360" y="2258568"/>
-            <a:ext cx="11002975" cy="685800"/>
+            <a:off x="640080" y="2052828"/>
+            <a:ext cx="10911535" cy="731520"/>
           </a:xfrm>
           <a:prstGeom prst="rect">
             <a:avLst/>
@@ -4914,7 +4564,7 @@
           <a:p>
             <a:pPr algn="ctr"/>
             <a:r>
-              <a:rPr sz="4400" b="1" i="0">
+              <a:rPr sz="4800" b="1" i="0">
                 <a:solidFill>
                   <a:srgbClr val="FFFFFF"/>
                 </a:solidFill>
@@ -4933,8 +4583,8 @@
         </p:nvSpPr>
         <p:spPr>
           <a:xfrm>
-            <a:off x="594360" y="2980944"/>
-            <a:ext cx="11002975" cy="347472"/>
+            <a:off x="640080" y="2985516"/>
+            <a:ext cx="10911535" cy="731520"/>
           </a:xfrm>
           <a:prstGeom prst="rect">
             <a:avLst/>
@@ -4949,83 +4599,13 @@
           <a:p>
             <a:pPr algn="ctr"/>
             <a:r>
-              <a:rPr sz="2200" b="0" i="1">
-                <a:solidFill>
-                  <a:srgbClr val="8C8C8C"/>
-                </a:solidFill>
-                <a:latin typeface="Arial"/>
-              </a:rPr>
-              <a:t/>
-            </a:r>
-          </a:p>
-        </p:txBody>
-      </p:sp>
-      <p:sp>
-        <p:nvSpPr>
-          <p:cNvPr id="4" name="TextBox 3"/>
-          <p:cNvSpPr txBox="1"/>
-          <p:nvPr/>
-        </p:nvSpPr>
-        <p:spPr>
-          <a:xfrm>
-            <a:off x="594360" y="3529584"/>
-            <a:ext cx="11002975" cy="685800"/>
-          </a:xfrm>
-          <a:prstGeom prst="rect">
-            <a:avLst/>
-          </a:prstGeom>
-          <a:noFill/>
-        </p:spPr>
-        <p:txBody>
-          <a:bodyPr wrap="square">
-            <a:spAutoFit/>
-          </a:bodyPr>
-          <a:lstStyle/>
-          <a:p>
-            <a:pPr algn="ctr"/>
-            <a:r>
-              <a:rPr sz="4400" b="1" i="0">
+              <a:rPr sz="4800" b="1" i="0">
                 <a:solidFill>
                   <a:srgbClr val="FFFFFF"/>
                 </a:solidFill>
                 <a:latin typeface="Arial"/>
               </a:rPr>
               <a:t>Bendito seja o nome do Senhor</a:t>
-            </a:r>
-          </a:p>
-        </p:txBody>
-      </p:sp>
-      <p:sp>
-        <p:nvSpPr>
-          <p:cNvPr id="5" name="TextBox 4"/>
-          <p:cNvSpPr txBox="1"/>
-          <p:nvPr/>
-        </p:nvSpPr>
-        <p:spPr>
-          <a:xfrm>
-            <a:off x="594360" y="4251960"/>
-            <a:ext cx="11002975" cy="347472"/>
-          </a:xfrm>
-          <a:prstGeom prst="rect">
-            <a:avLst/>
-          </a:prstGeom>
-          <a:noFill/>
-        </p:spPr>
-        <p:txBody>
-          <a:bodyPr wrap="square">
-            <a:spAutoFit/>
-          </a:bodyPr>
-          <a:lstStyle/>
-          <a:p>
-            <a:pPr algn="ctr"/>
-            <a:r>
-              <a:rPr sz="2200" b="0" i="1">
-                <a:solidFill>
-                  <a:srgbClr val="8C8C8C"/>
-                </a:solidFill>
-                <a:latin typeface="Arial"/>
-              </a:rPr>
-              <a:t/>
             </a:r>
           </a:p>
         </p:txBody>
@@ -5064,8 +4644,8 @@
         </p:nvSpPr>
         <p:spPr>
           <a:xfrm>
-            <a:off x="594360" y="2258568"/>
-            <a:ext cx="11002975" cy="685800"/>
+            <a:off x="640080" y="2052828"/>
+            <a:ext cx="10911535" cy="731520"/>
           </a:xfrm>
           <a:prstGeom prst="rect">
             <a:avLst/>
@@ -5080,7 +4660,7 @@
           <a:p>
             <a:pPr algn="ctr"/>
             <a:r>
-              <a:rPr sz="4400" b="1" i="0">
+              <a:rPr sz="4800" b="1" i="0">
                 <a:solidFill>
                   <a:srgbClr val="FFFFFF"/>
                 </a:solidFill>
@@ -5099,8 +4679,8 @@
         </p:nvSpPr>
         <p:spPr>
           <a:xfrm>
-            <a:off x="594360" y="2980944"/>
-            <a:ext cx="11002975" cy="347472"/>
+            <a:off x="640080" y="2985516"/>
+            <a:ext cx="10911535" cy="731520"/>
           </a:xfrm>
           <a:prstGeom prst="rect">
             <a:avLst/>
@@ -5115,83 +4695,13 @@
           <a:p>
             <a:pPr algn="ctr"/>
             <a:r>
-              <a:rPr sz="2200" b="0" i="1">
-                <a:solidFill>
-                  <a:srgbClr val="8C8C8C"/>
-                </a:solidFill>
-                <a:latin typeface="Arial"/>
-              </a:rPr>
-              <a:t/>
-            </a:r>
-          </a:p>
-        </p:txBody>
-      </p:sp>
-      <p:sp>
-        <p:nvSpPr>
-          <p:cNvPr id="4" name="TextBox 3"/>
-          <p:cNvSpPr txBox="1"/>
-          <p:nvPr/>
-        </p:nvSpPr>
-        <p:spPr>
-          <a:xfrm>
-            <a:off x="594360" y="3529584"/>
-            <a:ext cx="11002975" cy="685800"/>
-          </a:xfrm>
-          <a:prstGeom prst="rect">
-            <a:avLst/>
-          </a:prstGeom>
-          <a:noFill/>
-        </p:spPr>
-        <p:txBody>
-          <a:bodyPr wrap="square">
-            <a:spAutoFit/>
-          </a:bodyPr>
-          <a:lstStyle/>
-          <a:p>
-            <a:pPr algn="ctr"/>
-            <a:r>
-              <a:rPr sz="4400" b="1" i="0">
+              <a:rPr sz="4800" b="1" i="0">
                 <a:solidFill>
                   <a:srgbClr val="FFFFFF"/>
                 </a:solidFill>
                 <a:latin typeface="Arial"/>
               </a:rPr>
               <a:t>Bendito seja o Teu nome</a:t>
-            </a:r>
-          </a:p>
-        </p:txBody>
-      </p:sp>
-      <p:sp>
-        <p:nvSpPr>
-          <p:cNvPr id="5" name="TextBox 4"/>
-          <p:cNvSpPr txBox="1"/>
-          <p:nvPr/>
-        </p:nvSpPr>
-        <p:spPr>
-          <a:xfrm>
-            <a:off x="594360" y="4251960"/>
-            <a:ext cx="11002975" cy="347472"/>
-          </a:xfrm>
-          <a:prstGeom prst="rect">
-            <a:avLst/>
-          </a:prstGeom>
-          <a:noFill/>
-        </p:spPr>
-        <p:txBody>
-          <a:bodyPr wrap="square">
-            <a:spAutoFit/>
-          </a:bodyPr>
-          <a:lstStyle/>
-          <a:p>
-            <a:pPr algn="ctr"/>
-            <a:r>
-              <a:rPr sz="2200" b="0" i="1">
-                <a:solidFill>
-                  <a:srgbClr val="8C8C8C"/>
-                </a:solidFill>
-                <a:latin typeface="Arial"/>
-              </a:rPr>
-              <a:t/>
             </a:r>
           </a:p>
         </p:txBody>
@@ -5230,8 +4740,8 @@
         </p:nvSpPr>
         <p:spPr>
           <a:xfrm>
-            <a:off x="594360" y="2258568"/>
-            <a:ext cx="11002975" cy="685800"/>
+            <a:off x="640080" y="2052828"/>
+            <a:ext cx="10911535" cy="731520"/>
           </a:xfrm>
           <a:prstGeom prst="rect">
             <a:avLst/>
@@ -5246,7 +4756,7 @@
           <a:p>
             <a:pPr algn="ctr"/>
             <a:r>
-              <a:rPr sz="4400" b="1" i="0">
+              <a:rPr sz="4800" b="1" i="0">
                 <a:solidFill>
                   <a:srgbClr val="FFFFFF"/>
                 </a:solidFill>
@@ -5265,8 +4775,8 @@
         </p:nvSpPr>
         <p:spPr>
           <a:xfrm>
-            <a:off x="594360" y="2980944"/>
-            <a:ext cx="11002975" cy="347472"/>
+            <a:off x="640080" y="2985516"/>
+            <a:ext cx="10911535" cy="731520"/>
           </a:xfrm>
           <a:prstGeom prst="rect">
             <a:avLst/>
@@ -5281,83 +4791,13 @@
           <a:p>
             <a:pPr algn="ctr"/>
             <a:r>
-              <a:rPr sz="2200" b="0" i="1">
-                <a:solidFill>
-                  <a:srgbClr val="8C8C8C"/>
-                </a:solidFill>
-                <a:latin typeface="Arial"/>
-              </a:rPr>
-              <a:t/>
-            </a:r>
-          </a:p>
-        </p:txBody>
-      </p:sp>
-      <p:sp>
-        <p:nvSpPr>
-          <p:cNvPr id="4" name="TextBox 3"/>
-          <p:cNvSpPr txBox="1"/>
-          <p:nvPr/>
-        </p:nvSpPr>
-        <p:spPr>
-          <a:xfrm>
-            <a:off x="594360" y="3529584"/>
-            <a:ext cx="11002975" cy="685800"/>
-          </a:xfrm>
-          <a:prstGeom prst="rect">
-            <a:avLst/>
-          </a:prstGeom>
-          <a:noFill/>
-        </p:spPr>
-        <p:txBody>
-          <a:bodyPr wrap="square">
-            <a:spAutoFit/>
-          </a:bodyPr>
-          <a:lstStyle/>
-          <a:p>
-            <a:pPr algn="ctr"/>
-            <a:r>
-              <a:rPr sz="3610" b="1" i="0">
+              <a:rPr sz="3900" b="1" i="0">
                 <a:solidFill>
                   <a:srgbClr val="FFFFFF"/>
                 </a:solidFill>
                 <a:latin typeface="Arial"/>
               </a:rPr>
               <a:t>Onde fluem Tuas correntes de abundância</a:t>
-            </a:r>
-          </a:p>
-        </p:txBody>
-      </p:sp>
-      <p:sp>
-        <p:nvSpPr>
-          <p:cNvPr id="5" name="TextBox 4"/>
-          <p:cNvSpPr txBox="1"/>
-          <p:nvPr/>
-        </p:nvSpPr>
-        <p:spPr>
-          <a:xfrm>
-            <a:off x="594360" y="4251960"/>
-            <a:ext cx="11002975" cy="347472"/>
-          </a:xfrm>
-          <a:prstGeom prst="rect">
-            <a:avLst/>
-          </a:prstGeom>
-          <a:noFill/>
-        </p:spPr>
-        <p:txBody>
-          <a:bodyPr wrap="square">
-            <a:spAutoFit/>
-          </a:bodyPr>
-          <a:lstStyle/>
-          <a:p>
-            <a:pPr algn="ctr"/>
-            <a:r>
-              <a:rPr sz="2200" b="0" i="1">
-                <a:solidFill>
-                  <a:srgbClr val="8C8C8C"/>
-                </a:solidFill>
-                <a:latin typeface="Arial"/>
-              </a:rPr>
-              <a:t/>
             </a:r>
           </a:p>
         </p:txBody>
@@ -5396,8 +4836,8 @@
         </p:nvSpPr>
         <p:spPr>
           <a:xfrm>
-            <a:off x="594360" y="2258568"/>
-            <a:ext cx="11002975" cy="685800"/>
+            <a:off x="640080" y="2052828"/>
+            <a:ext cx="10911535" cy="731520"/>
           </a:xfrm>
           <a:prstGeom prst="rect">
             <a:avLst/>
@@ -5412,7 +4852,7 @@
           <a:p>
             <a:pPr algn="ctr"/>
             <a:r>
-              <a:rPr sz="4400" b="1" i="0">
+              <a:rPr sz="4800" b="1" i="0">
                 <a:solidFill>
                   <a:srgbClr val="FFFFFF"/>
                 </a:solidFill>
@@ -5431,8 +4871,8 @@
         </p:nvSpPr>
         <p:spPr>
           <a:xfrm>
-            <a:off x="594360" y="2980944"/>
-            <a:ext cx="11002975" cy="347472"/>
+            <a:off x="640080" y="2985516"/>
+            <a:ext cx="10911535" cy="731520"/>
           </a:xfrm>
           <a:prstGeom prst="rect">
             <a:avLst/>
@@ -5447,83 +4887,13 @@
           <a:p>
             <a:pPr algn="ctr"/>
             <a:r>
-              <a:rPr sz="2200" b="0" i="1">
-                <a:solidFill>
-                  <a:srgbClr val="8C8C8C"/>
-                </a:solidFill>
-                <a:latin typeface="Arial"/>
-              </a:rPr>
-              <a:t/>
-            </a:r>
-          </a:p>
-        </p:txBody>
-      </p:sp>
-      <p:sp>
-        <p:nvSpPr>
-          <p:cNvPr id="4" name="TextBox 3"/>
-          <p:cNvSpPr txBox="1"/>
-          <p:nvPr/>
-        </p:nvSpPr>
-        <p:spPr>
-          <a:xfrm>
-            <a:off x="594360" y="3529584"/>
-            <a:ext cx="11002975" cy="685800"/>
-          </a:xfrm>
-          <a:prstGeom prst="rect">
-            <a:avLst/>
-          </a:prstGeom>
-          <a:noFill/>
-        </p:spPr>
-        <p:txBody>
-          <a:bodyPr wrap="square">
-            <a:spAutoFit/>
-          </a:bodyPr>
-          <a:lstStyle/>
-          <a:p>
-            <a:pPr algn="ctr"/>
-            <a:r>
-              <a:rPr sz="4400" b="1" i="0">
+              <a:rPr sz="4800" b="1" i="0">
                 <a:solidFill>
                   <a:srgbClr val="FFFFFF"/>
                 </a:solidFill>
                 <a:latin typeface="Arial"/>
               </a:rPr>
               <a:t>Bendito seja o Teu nome</a:t>
-            </a:r>
-          </a:p>
-        </p:txBody>
-      </p:sp>
-      <p:sp>
-        <p:nvSpPr>
-          <p:cNvPr id="5" name="TextBox 4"/>
-          <p:cNvSpPr txBox="1"/>
-          <p:nvPr/>
-        </p:nvSpPr>
-        <p:spPr>
-          <a:xfrm>
-            <a:off x="594360" y="4251960"/>
-            <a:ext cx="11002975" cy="347472"/>
-          </a:xfrm>
-          <a:prstGeom prst="rect">
-            <a:avLst/>
-          </a:prstGeom>
-          <a:noFill/>
-        </p:spPr>
-        <p:txBody>
-          <a:bodyPr wrap="square">
-            <a:spAutoFit/>
-          </a:bodyPr>
-          <a:lstStyle/>
-          <a:p>
-            <a:pPr algn="ctr"/>
-            <a:r>
-              <a:rPr sz="2200" b="0" i="1">
-                <a:solidFill>
-                  <a:srgbClr val="8C8C8C"/>
-                </a:solidFill>
-                <a:latin typeface="Arial"/>
-              </a:rPr>
-              <a:t/>
             </a:r>
           </a:p>
         </p:txBody>
@@ -5562,8 +4932,8 @@
         </p:nvSpPr>
         <p:spPr>
           <a:xfrm>
-            <a:off x="594360" y="1837944"/>
-            <a:ext cx="11002975" cy="685800"/>
+            <a:off x="640080" y="1650492"/>
+            <a:ext cx="10911535" cy="731520"/>
           </a:xfrm>
           <a:prstGeom prst="rect">
             <a:avLst/>
@@ -5578,7 +4948,7 @@
           <a:p>
             <a:pPr algn="ctr"/>
             <a:r>
-              <a:rPr sz="4400" b="1" i="0">
+              <a:rPr sz="4800" b="1" i="0">
                 <a:solidFill>
                   <a:srgbClr val="FFFFFF"/>
                 </a:solidFill>
@@ -5597,8 +4967,8 @@
         </p:nvSpPr>
         <p:spPr>
           <a:xfrm>
-            <a:off x="594360" y="2560320"/>
-            <a:ext cx="11002975" cy="384048"/>
+            <a:off x="640080" y="2418588"/>
+            <a:ext cx="10911535" cy="365760"/>
           </a:xfrm>
           <a:prstGeom prst="rect">
             <a:avLst/>
@@ -5615,7 +4985,7 @@
             <a:r>
               <a:rPr sz="2400" b="0" i="1">
                 <a:solidFill>
-                  <a:srgbClr val="B4B4B4"/>
+                  <a:srgbClr val="AAAAAA"/>
                 </a:solidFill>
                 <a:latin typeface="Arial"/>
               </a:rPr>
@@ -5632,8 +5002,8 @@
         </p:nvSpPr>
         <p:spPr>
           <a:xfrm>
-            <a:off x="594360" y="2980944"/>
-            <a:ext cx="11002975" cy="347472"/>
+            <a:off x="640080" y="2985516"/>
+            <a:ext cx="10911535" cy="731520"/>
           </a:xfrm>
           <a:prstGeom prst="rect">
             <a:avLst/>
@@ -5648,13 +5018,13 @@
           <a:p>
             <a:pPr algn="ctr"/>
             <a:r>
-              <a:rPr sz="2000" b="0" i="1">
-                <a:solidFill>
-                  <a:srgbClr val="8C8C8C"/>
+              <a:rPr sz="4800" b="1" i="0">
+                <a:solidFill>
+                  <a:srgbClr val="FFFFFF"/>
                 </a:solidFill>
                 <a:latin typeface="Arial"/>
               </a:rPr>
-              <a:t/>
+              <a:t>主の御名をほめよ     栄光ある主の御名</a:t>
             </a:r>
           </a:p>
         </p:txBody>
@@ -5667,8 +5037,8 @@
         </p:nvSpPr>
         <p:spPr>
           <a:xfrm>
-            <a:off x="594360" y="3529584"/>
-            <a:ext cx="11002975" cy="685800"/>
+            <a:off x="640080" y="3753612"/>
+            <a:ext cx="10911535" cy="365760"/>
           </a:xfrm>
           <a:prstGeom prst="rect">
             <a:avLst/>
@@ -5683,13 +5053,13 @@
           <a:p>
             <a:pPr algn="ctr"/>
             <a:r>
-              <a:rPr sz="4400" b="1" i="0">
-                <a:solidFill>
-                  <a:srgbClr val="FFFFFF"/>
+              <a:rPr sz="2400" b="0" i="1">
+                <a:solidFill>
+                  <a:srgbClr val="AAAAAA"/>
                 </a:solidFill>
                 <a:latin typeface="Arial"/>
               </a:rPr>
-              <a:t>主の御名をほめよ     栄光ある主の御名</a:t>
+              <a:t>shu no mina wo homeyo  eikou aru shu no mina</a:t>
             </a:r>
           </a:p>
         </p:txBody>
@@ -5702,8 +5072,8 @@
         </p:nvSpPr>
         <p:spPr>
           <a:xfrm>
-            <a:off x="594360" y="4251960"/>
-            <a:ext cx="11002975" cy="384048"/>
+            <a:off x="640080" y="4530852"/>
+            <a:ext cx="10911535" cy="310896"/>
           </a:xfrm>
           <a:prstGeom prst="rect">
             <a:avLst/>
@@ -5718,13 +5088,13 @@
           <a:p>
             <a:pPr algn="ctr"/>
             <a:r>
-              <a:rPr sz="2290" b="0" i="1">
-                <a:solidFill>
-                  <a:srgbClr val="B4B4B4"/>
+              <a:rPr sz="2000" b="0" i="1">
+                <a:solidFill>
+                  <a:srgbClr val="828282"/>
                 </a:solidFill>
                 <a:latin typeface="Arial"/>
               </a:rPr>
-              <a:t>shu no mina wo homeyo  eikou aru shu no mina</a:t>
+              <a:t>Ainda direi</a:t>
             </a:r>
           </a:p>
         </p:txBody>
@@ -5737,8 +5107,8 @@
         </p:nvSpPr>
         <p:spPr>
           <a:xfrm>
-            <a:off x="594360" y="4672584"/>
-            <a:ext cx="11002975" cy="347472"/>
+            <a:off x="640080" y="4896612"/>
+            <a:ext cx="10911535" cy="310896"/>
           </a:xfrm>
           <a:prstGeom prst="rect">
             <a:avLst/>
@@ -5755,11 +5125,11 @@
             <a:r>
               <a:rPr sz="2000" b="0" i="1">
                 <a:solidFill>
-                  <a:srgbClr val="8C8C8C"/>
+                  <a:srgbClr val="828282"/>
                 </a:solidFill>
                 <a:latin typeface="Arial"/>
               </a:rPr>
-              <a:t/>
+              <a:t>Bendito seja o nome do Senhor</a:t>
             </a:r>
           </a:p>
         </p:txBody>
@@ -5798,8 +5168,8 @@
         </p:nvSpPr>
         <p:spPr>
           <a:xfrm>
-            <a:off x="594360" y="2258568"/>
-            <a:ext cx="11002975" cy="685800"/>
+            <a:off x="640080" y="2052828"/>
+            <a:ext cx="10911535" cy="731520"/>
           </a:xfrm>
           <a:prstGeom prst="rect">
             <a:avLst/>
@@ -5814,7 +5184,7 @@
           <a:p>
             <a:pPr algn="ctr"/>
             <a:r>
-              <a:rPr sz="4400" b="1" i="0">
+              <a:rPr sz="4800" b="1" i="0">
                 <a:solidFill>
                   <a:srgbClr val="FFFFFF"/>
                 </a:solidFill>
@@ -5833,8 +5203,8 @@
         </p:nvSpPr>
         <p:spPr>
           <a:xfrm>
-            <a:off x="594360" y="2980944"/>
-            <a:ext cx="11002975" cy="347472"/>
+            <a:off x="640080" y="2985516"/>
+            <a:ext cx="10911535" cy="731520"/>
           </a:xfrm>
           <a:prstGeom prst="rect">
             <a:avLst/>
@@ -5849,83 +5219,13 @@
           <a:p>
             <a:pPr algn="ctr"/>
             <a:r>
-              <a:rPr sz="2200" b="0" i="1">
-                <a:solidFill>
-                  <a:srgbClr val="8C8C8C"/>
-                </a:solidFill>
-                <a:latin typeface="Arial"/>
-              </a:rPr>
-              <a:t/>
-            </a:r>
-          </a:p>
-        </p:txBody>
-      </p:sp>
-      <p:sp>
-        <p:nvSpPr>
-          <p:cNvPr id="4" name="TextBox 3"/>
-          <p:cNvSpPr txBox="1"/>
-          <p:nvPr/>
-        </p:nvSpPr>
-        <p:spPr>
-          <a:xfrm>
-            <a:off x="594360" y="3529584"/>
-            <a:ext cx="11002975" cy="685800"/>
-          </a:xfrm>
-          <a:prstGeom prst="rect">
-            <a:avLst/>
-          </a:prstGeom>
-          <a:noFill/>
-        </p:spPr>
-        <p:txBody>
-          <a:bodyPr wrap="square">
-            <a:spAutoFit/>
-          </a:bodyPr>
-          <a:lstStyle/>
-          <a:p>
-            <a:pPr algn="ctr"/>
-            <a:r>
-              <a:rPr sz="4400" b="1" i="0">
+              <a:rPr sz="4800" b="1" i="0">
                 <a:solidFill>
                   <a:srgbClr val="FFFFFF"/>
                 </a:solidFill>
                 <a:latin typeface="Arial"/>
               </a:rPr>
               <a:t>E bendito seja o Teu nome</a:t>
-            </a:r>
-          </a:p>
-        </p:txBody>
-      </p:sp>
-      <p:sp>
-        <p:nvSpPr>
-          <p:cNvPr id="5" name="TextBox 4"/>
-          <p:cNvSpPr txBox="1"/>
-          <p:nvPr/>
-        </p:nvSpPr>
-        <p:spPr>
-          <a:xfrm>
-            <a:off x="594360" y="4251960"/>
-            <a:ext cx="11002975" cy="347472"/>
-          </a:xfrm>
-          <a:prstGeom prst="rect">
-            <a:avLst/>
-          </a:prstGeom>
-          <a:noFill/>
-        </p:spPr>
-        <p:txBody>
-          <a:bodyPr wrap="square">
-            <a:spAutoFit/>
-          </a:bodyPr>
-          <a:lstStyle/>
-          <a:p>
-            <a:pPr algn="ctr"/>
-            <a:r>
-              <a:rPr sz="2200" b="0" i="1">
-                <a:solidFill>
-                  <a:srgbClr val="8C8C8C"/>
-                </a:solidFill>
-                <a:latin typeface="Arial"/>
-              </a:rPr>
-              <a:t/>
             </a:r>
           </a:p>
         </p:txBody>
@@ -5964,8 +5264,8 @@
         </p:nvSpPr>
         <p:spPr>
           <a:xfrm>
-            <a:off x="594360" y="2258568"/>
-            <a:ext cx="11002975" cy="685800"/>
+            <a:off x="640080" y="2052828"/>
+            <a:ext cx="10911535" cy="731520"/>
           </a:xfrm>
           <a:prstGeom prst="rect">
             <a:avLst/>
@@ -5980,7 +5280,7 @@
           <a:p>
             <a:pPr algn="ctr"/>
             <a:r>
-              <a:rPr sz="4400" b="1" i="0">
+              <a:rPr sz="4800" b="1" i="0">
                 <a:solidFill>
                   <a:srgbClr val="FFFFFF"/>
                 </a:solidFill>
@@ -5999,8 +5299,8 @@
         </p:nvSpPr>
         <p:spPr>
           <a:xfrm>
-            <a:off x="594360" y="2980944"/>
-            <a:ext cx="11002975" cy="347472"/>
+            <a:off x="640080" y="2985516"/>
+            <a:ext cx="10911535" cy="731520"/>
           </a:xfrm>
           <a:prstGeom prst="rect">
             <a:avLst/>
@@ -6015,83 +5315,13 @@
           <a:p>
             <a:pPr algn="ctr"/>
             <a:r>
-              <a:rPr sz="2200" b="0" i="1">
-                <a:solidFill>
-                  <a:srgbClr val="8C8C8C"/>
-                </a:solidFill>
-                <a:latin typeface="Arial"/>
-              </a:rPr>
-              <a:t/>
-            </a:r>
-          </a:p>
-        </p:txBody>
-      </p:sp>
-      <p:sp>
-        <p:nvSpPr>
-          <p:cNvPr id="4" name="TextBox 3"/>
-          <p:cNvSpPr txBox="1"/>
-          <p:nvPr/>
-        </p:nvSpPr>
-        <p:spPr>
-          <a:xfrm>
-            <a:off x="594360" y="3529584"/>
-            <a:ext cx="11002975" cy="685800"/>
-          </a:xfrm>
-          <a:prstGeom prst="rect">
-            <a:avLst/>
-          </a:prstGeom>
-          <a:noFill/>
-        </p:spPr>
-        <p:txBody>
-          <a:bodyPr wrap="square">
-            <a:spAutoFit/>
-          </a:bodyPr>
-          <a:lstStyle/>
-          <a:p>
-            <a:pPr algn="ctr"/>
-            <a:r>
-              <a:rPr sz="4266" b="1" i="0">
+              <a:rPr sz="4600" b="1" i="0">
                 <a:solidFill>
                   <a:srgbClr val="FFFFFF"/>
                 </a:solidFill>
                 <a:latin typeface="Arial"/>
               </a:rPr>
               <a:t>Ainda que eu caminhe pelo deserto</a:t>
-            </a:r>
-          </a:p>
-        </p:txBody>
-      </p:sp>
-      <p:sp>
-        <p:nvSpPr>
-          <p:cNvPr id="5" name="TextBox 4"/>
-          <p:cNvSpPr txBox="1"/>
-          <p:nvPr/>
-        </p:nvSpPr>
-        <p:spPr>
-          <a:xfrm>
-            <a:off x="594360" y="4251960"/>
-            <a:ext cx="11002975" cy="347472"/>
-          </a:xfrm>
-          <a:prstGeom prst="rect">
-            <a:avLst/>
-          </a:prstGeom>
-          <a:noFill/>
-        </p:spPr>
-        <p:txBody>
-          <a:bodyPr wrap="square">
-            <a:spAutoFit/>
-          </a:bodyPr>
-          <a:lstStyle/>
-          <a:p>
-            <a:pPr algn="ctr"/>
-            <a:r>
-              <a:rPr sz="2200" b="0" i="1">
-                <a:solidFill>
-                  <a:srgbClr val="8C8C8C"/>
-                </a:solidFill>
-                <a:latin typeface="Arial"/>
-              </a:rPr>
-              <a:t/>
             </a:r>
           </a:p>
         </p:txBody>
@@ -6130,8 +5360,8 @@
         </p:nvSpPr>
         <p:spPr>
           <a:xfrm>
-            <a:off x="594360" y="2258568"/>
-            <a:ext cx="11002975" cy="685800"/>
+            <a:off x="640080" y="2052828"/>
+            <a:ext cx="10911535" cy="731520"/>
           </a:xfrm>
           <a:prstGeom prst="rect">
             <a:avLst/>
@@ -6146,7 +5376,7 @@
           <a:p>
             <a:pPr algn="ctr"/>
             <a:r>
-              <a:rPr sz="4400" b="1" i="0">
+              <a:rPr sz="4800" b="1" i="0">
                 <a:solidFill>
                   <a:srgbClr val="FFFFFF"/>
                 </a:solidFill>
@@ -6165,8 +5395,8 @@
         </p:nvSpPr>
         <p:spPr>
           <a:xfrm>
-            <a:off x="594360" y="2980944"/>
-            <a:ext cx="11002975" cy="347472"/>
+            <a:off x="640080" y="2985516"/>
+            <a:ext cx="10911535" cy="731520"/>
           </a:xfrm>
           <a:prstGeom prst="rect">
             <a:avLst/>
@@ -6181,83 +5411,13 @@
           <a:p>
             <a:pPr algn="ctr"/>
             <a:r>
-              <a:rPr sz="2200" b="0" i="1">
-                <a:solidFill>
-                  <a:srgbClr val="8C8C8C"/>
-                </a:solidFill>
-                <a:latin typeface="Arial"/>
-              </a:rPr>
-              <a:t/>
-            </a:r>
-          </a:p>
-        </p:txBody>
-      </p:sp>
-      <p:sp>
-        <p:nvSpPr>
-          <p:cNvPr id="4" name="TextBox 3"/>
-          <p:cNvSpPr txBox="1"/>
-          <p:nvPr/>
-        </p:nvSpPr>
-        <p:spPr>
-          <a:xfrm>
-            <a:off x="594360" y="3529584"/>
-            <a:ext cx="11002975" cy="685800"/>
-          </a:xfrm>
-          <a:prstGeom prst="rect">
-            <a:avLst/>
-          </a:prstGeom>
-          <a:noFill/>
-        </p:spPr>
-        <p:txBody>
-          <a:bodyPr wrap="square">
-            <a:spAutoFit/>
-          </a:bodyPr>
-          <a:lstStyle/>
-          <a:p>
-            <a:pPr algn="ctr"/>
-            <a:r>
-              <a:rPr sz="4400" b="1" i="0">
+              <a:rPr sz="4800" b="1" i="0">
                 <a:solidFill>
                   <a:srgbClr val="FFFFFF"/>
                 </a:solidFill>
                 <a:latin typeface="Arial"/>
               </a:rPr>
               <a:t>Toda bênção que Tu derramardes</a:t>
-            </a:r>
-          </a:p>
-        </p:txBody>
-      </p:sp>
-      <p:sp>
-        <p:nvSpPr>
-          <p:cNvPr id="5" name="TextBox 4"/>
-          <p:cNvSpPr txBox="1"/>
-          <p:nvPr/>
-        </p:nvSpPr>
-        <p:spPr>
-          <a:xfrm>
-            <a:off x="594360" y="4251960"/>
-            <a:ext cx="11002975" cy="347472"/>
-          </a:xfrm>
-          <a:prstGeom prst="rect">
-            <a:avLst/>
-          </a:prstGeom>
-          <a:noFill/>
-        </p:spPr>
-        <p:txBody>
-          <a:bodyPr wrap="square">
-            <a:spAutoFit/>
-          </a:bodyPr>
-          <a:lstStyle/>
-          <a:p>
-            <a:pPr algn="ctr"/>
-            <a:r>
-              <a:rPr sz="2200" b="0" i="1">
-                <a:solidFill>
-                  <a:srgbClr val="8C8C8C"/>
-                </a:solidFill>
-                <a:latin typeface="Arial"/>
-              </a:rPr>
-              <a:t/>
             </a:r>
           </a:p>
         </p:txBody>
@@ -6296,8 +5456,8 @@
         </p:nvSpPr>
         <p:spPr>
           <a:xfrm>
-            <a:off x="594360" y="2258568"/>
-            <a:ext cx="11002975" cy="685800"/>
+            <a:off x="640080" y="2052828"/>
+            <a:ext cx="10911535" cy="731520"/>
           </a:xfrm>
           <a:prstGeom prst="rect">
             <a:avLst/>
@@ -6312,7 +5472,7 @@
           <a:p>
             <a:pPr algn="ctr"/>
             <a:r>
-              <a:rPr sz="4400" b="1" i="0">
+              <a:rPr sz="4800" b="1" i="0">
                 <a:solidFill>
                   <a:srgbClr val="FFFFFF"/>
                 </a:solidFill>
@@ -6331,8 +5491,8 @@
         </p:nvSpPr>
         <p:spPr>
           <a:xfrm>
-            <a:off x="594360" y="2980944"/>
-            <a:ext cx="11002975" cy="347472"/>
+            <a:off x="640080" y="2985516"/>
+            <a:ext cx="10911535" cy="731520"/>
           </a:xfrm>
           <a:prstGeom prst="rect">
             <a:avLst/>
@@ -6347,83 +5507,13 @@
           <a:p>
             <a:pPr algn="ctr"/>
             <a:r>
-              <a:rPr sz="2200" b="0" i="1">
-                <a:solidFill>
-                  <a:srgbClr val="8C8C8C"/>
-                </a:solidFill>
-                <a:latin typeface="Arial"/>
-              </a:rPr>
-              <a:t/>
-            </a:r>
-          </a:p>
-        </p:txBody>
-      </p:sp>
-      <p:sp>
-        <p:nvSpPr>
-          <p:cNvPr id="4" name="TextBox 3"/>
-          <p:cNvSpPr txBox="1"/>
-          <p:nvPr/>
-        </p:nvSpPr>
-        <p:spPr>
-          <a:xfrm>
-            <a:off x="594360" y="3529584"/>
-            <a:ext cx="11002975" cy="685800"/>
-          </a:xfrm>
-          <a:prstGeom prst="rect">
-            <a:avLst/>
-          </a:prstGeom>
-          <a:noFill/>
-        </p:spPr>
-        <p:txBody>
-          <a:bodyPr wrap="square">
-            <a:spAutoFit/>
-          </a:bodyPr>
-          <a:lstStyle/>
-          <a:p>
-            <a:pPr algn="ctr"/>
-            <a:r>
-              <a:rPr sz="3520" b="1" i="0">
+              <a:rPr sz="3800" b="1" i="0">
                 <a:solidFill>
                   <a:srgbClr val="FFFFFF"/>
                 </a:solidFill>
                 <a:latin typeface="Arial"/>
               </a:rPr>
               <a:t>E quando as trevas me envolverem, Senhor</a:t>
-            </a:r>
-          </a:p>
-        </p:txBody>
-      </p:sp>
-      <p:sp>
-        <p:nvSpPr>
-          <p:cNvPr id="5" name="TextBox 4"/>
-          <p:cNvSpPr txBox="1"/>
-          <p:nvPr/>
-        </p:nvSpPr>
-        <p:spPr>
-          <a:xfrm>
-            <a:off x="594360" y="4251960"/>
-            <a:ext cx="11002975" cy="347472"/>
-          </a:xfrm>
-          <a:prstGeom prst="rect">
-            <a:avLst/>
-          </a:prstGeom>
-          <a:noFill/>
-        </p:spPr>
-        <p:txBody>
-          <a:bodyPr wrap="square">
-            <a:spAutoFit/>
-          </a:bodyPr>
-          <a:lstStyle/>
-          <a:p>
-            <a:pPr algn="ctr"/>
-            <a:r>
-              <a:rPr sz="2200" b="0" i="1">
-                <a:solidFill>
-                  <a:srgbClr val="8C8C8C"/>
-                </a:solidFill>
-                <a:latin typeface="Arial"/>
-              </a:rPr>
-              <a:t/>
             </a:r>
           </a:p>
         </p:txBody>
@@ -6462,8 +5552,8 @@
         </p:nvSpPr>
         <p:spPr>
           <a:xfrm>
-            <a:off x="594360" y="2258568"/>
-            <a:ext cx="11002975" cy="685800"/>
+            <a:off x="640080" y="2052828"/>
+            <a:ext cx="10911535" cy="731520"/>
           </a:xfrm>
           <a:prstGeom prst="rect">
             <a:avLst/>
@@ -6478,7 +5568,7 @@
           <a:p>
             <a:pPr algn="ctr"/>
             <a:r>
-              <a:rPr sz="4400" b="1" i="0">
+              <a:rPr sz="4800" b="1" i="0">
                 <a:solidFill>
                   <a:srgbClr val="FFFFFF"/>
                 </a:solidFill>
@@ -6497,8 +5587,8 @@
         </p:nvSpPr>
         <p:spPr>
           <a:xfrm>
-            <a:off x="594360" y="2980944"/>
-            <a:ext cx="11002975" cy="347472"/>
+            <a:off x="640080" y="2985516"/>
+            <a:ext cx="10911535" cy="731520"/>
           </a:xfrm>
           <a:prstGeom prst="rect">
             <a:avLst/>
@@ -6513,83 +5603,13 @@
           <a:p>
             <a:pPr algn="ctr"/>
             <a:r>
-              <a:rPr sz="2200" b="0" i="1">
-                <a:solidFill>
-                  <a:srgbClr val="8C8C8C"/>
-                </a:solidFill>
-                <a:latin typeface="Arial"/>
-              </a:rPr>
-              <a:t/>
-            </a:r>
-          </a:p>
-        </p:txBody>
-      </p:sp>
-      <p:sp>
-        <p:nvSpPr>
-          <p:cNvPr id="4" name="TextBox 3"/>
-          <p:cNvSpPr txBox="1"/>
-          <p:nvPr/>
-        </p:nvSpPr>
-        <p:spPr>
-          <a:xfrm>
-            <a:off x="594360" y="3529584"/>
-            <a:ext cx="11002975" cy="685800"/>
-          </a:xfrm>
-          <a:prstGeom prst="rect">
-            <a:avLst/>
-          </a:prstGeom>
-          <a:noFill/>
-        </p:spPr>
-        <p:txBody>
-          <a:bodyPr wrap="square">
-            <a:spAutoFit/>
-          </a:bodyPr>
-          <a:lstStyle/>
-          <a:p>
-            <a:pPr algn="ctr"/>
-            <a:r>
-              <a:rPr sz="4400" b="1" i="0">
+              <a:rPr sz="4800" b="1" i="0">
                 <a:solidFill>
                   <a:srgbClr val="FFFFFF"/>
                 </a:solidFill>
                 <a:latin typeface="Arial"/>
               </a:rPr>
               <a:t>Bendito seja o nome do Senhor</a:t>
-            </a:r>
-          </a:p>
-        </p:txBody>
-      </p:sp>
-      <p:sp>
-        <p:nvSpPr>
-          <p:cNvPr id="5" name="TextBox 4"/>
-          <p:cNvSpPr txBox="1"/>
-          <p:nvPr/>
-        </p:nvSpPr>
-        <p:spPr>
-          <a:xfrm>
-            <a:off x="594360" y="4251960"/>
-            <a:ext cx="11002975" cy="347472"/>
-          </a:xfrm>
-          <a:prstGeom prst="rect">
-            <a:avLst/>
-          </a:prstGeom>
-          <a:noFill/>
-        </p:spPr>
-        <p:txBody>
-          <a:bodyPr wrap="square">
-            <a:spAutoFit/>
-          </a:bodyPr>
-          <a:lstStyle/>
-          <a:p>
-            <a:pPr algn="ctr"/>
-            <a:r>
-              <a:rPr sz="2200" b="0" i="1">
-                <a:solidFill>
-                  <a:srgbClr val="8C8C8C"/>
-                </a:solidFill>
-                <a:latin typeface="Arial"/>
-              </a:rPr>
-              <a:t/>
             </a:r>
           </a:p>
         </p:txBody>
@@ -6628,8 +5648,8 @@
         </p:nvSpPr>
         <p:spPr>
           <a:xfrm>
-            <a:off x="594360" y="2258568"/>
-            <a:ext cx="11002975" cy="685800"/>
+            <a:off x="640080" y="2052828"/>
+            <a:ext cx="10911535" cy="731520"/>
           </a:xfrm>
           <a:prstGeom prst="rect">
             <a:avLst/>
@@ -6644,7 +5664,7 @@
           <a:p>
             <a:pPr algn="ctr"/>
             <a:r>
-              <a:rPr sz="4400" b="1" i="0">
+              <a:rPr sz="4800" b="1" i="0">
                 <a:solidFill>
                   <a:srgbClr val="FFFFFF"/>
                 </a:solidFill>
@@ -6663,8 +5683,8 @@
         </p:nvSpPr>
         <p:spPr>
           <a:xfrm>
-            <a:off x="594360" y="2980944"/>
-            <a:ext cx="11002975" cy="347472"/>
+            <a:off x="640080" y="2985516"/>
+            <a:ext cx="10911535" cy="731520"/>
           </a:xfrm>
           <a:prstGeom prst="rect">
             <a:avLst/>
@@ -6679,83 +5699,13 @@
           <a:p>
             <a:pPr algn="ctr"/>
             <a:r>
-              <a:rPr sz="2200" b="0" i="1">
-                <a:solidFill>
-                  <a:srgbClr val="8C8C8C"/>
-                </a:solidFill>
-                <a:latin typeface="Arial"/>
-              </a:rPr>
-              <a:t/>
-            </a:r>
-          </a:p>
-        </p:txBody>
-      </p:sp>
-      <p:sp>
-        <p:nvSpPr>
-          <p:cNvPr id="4" name="TextBox 3"/>
-          <p:cNvSpPr txBox="1"/>
-          <p:nvPr/>
-        </p:nvSpPr>
-        <p:spPr>
-          <a:xfrm>
-            <a:off x="594360" y="3529584"/>
-            <a:ext cx="11002975" cy="685800"/>
-          </a:xfrm>
-          <a:prstGeom prst="rect">
-            <a:avLst/>
-          </a:prstGeom>
-          <a:noFill/>
-        </p:spPr>
-        <p:txBody>
-          <a:bodyPr wrap="square">
-            <a:spAutoFit/>
-          </a:bodyPr>
-          <a:lstStyle/>
-          <a:p>
-            <a:pPr algn="ctr"/>
-            <a:r>
-              <a:rPr sz="4400" b="1" i="0">
+              <a:rPr sz="4800" b="1" i="0">
                 <a:solidFill>
                   <a:srgbClr val="FFFFFF"/>
                 </a:solidFill>
                 <a:latin typeface="Arial"/>
               </a:rPr>
               <a:t>Bendito seja o nome do Senhor</a:t>
-            </a:r>
-          </a:p>
-        </p:txBody>
-      </p:sp>
-      <p:sp>
-        <p:nvSpPr>
-          <p:cNvPr id="5" name="TextBox 4"/>
-          <p:cNvSpPr txBox="1"/>
-          <p:nvPr/>
-        </p:nvSpPr>
-        <p:spPr>
-          <a:xfrm>
-            <a:off x="594360" y="4251960"/>
-            <a:ext cx="11002975" cy="347472"/>
-          </a:xfrm>
-          <a:prstGeom prst="rect">
-            <a:avLst/>
-          </a:prstGeom>
-          <a:noFill/>
-        </p:spPr>
-        <p:txBody>
-          <a:bodyPr wrap="square">
-            <a:spAutoFit/>
-          </a:bodyPr>
-          <a:lstStyle/>
-          <a:p>
-            <a:pPr algn="ctr"/>
-            <a:r>
-              <a:rPr sz="2200" b="0" i="1">
-                <a:solidFill>
-                  <a:srgbClr val="8C8C8C"/>
-                </a:solidFill>
-                <a:latin typeface="Arial"/>
-              </a:rPr>
-              <a:t/>
             </a:r>
           </a:p>
         </p:txBody>
@@ -6794,8 +5744,8 @@
         </p:nvSpPr>
         <p:spPr>
           <a:xfrm>
-            <a:off x="594360" y="2258568"/>
-            <a:ext cx="11002975" cy="685800"/>
+            <a:off x="640080" y="2052828"/>
+            <a:ext cx="10911535" cy="731520"/>
           </a:xfrm>
           <a:prstGeom prst="rect">
             <a:avLst/>
@@ -6810,7 +5760,7 @@
           <a:p>
             <a:pPr algn="ctr"/>
             <a:r>
-              <a:rPr sz="4400" b="1" i="0">
+              <a:rPr sz="4800" b="1" i="0">
                 <a:solidFill>
                   <a:srgbClr val="FFFFFF"/>
                 </a:solidFill>
@@ -6829,8 +5779,8 @@
         </p:nvSpPr>
         <p:spPr>
           <a:xfrm>
-            <a:off x="594360" y="2980944"/>
-            <a:ext cx="11002975" cy="347472"/>
+            <a:off x="640080" y="2985516"/>
+            <a:ext cx="10911535" cy="731520"/>
           </a:xfrm>
           <a:prstGeom prst="rect">
             <a:avLst/>
@@ -6845,83 +5795,13 @@
           <a:p>
             <a:pPr algn="ctr"/>
             <a:r>
-              <a:rPr sz="2200" b="0" i="1">
-                <a:solidFill>
-                  <a:srgbClr val="8C8C8C"/>
-                </a:solidFill>
-                <a:latin typeface="Arial"/>
-              </a:rPr>
-              <a:t/>
-            </a:r>
-          </a:p>
-        </p:txBody>
-      </p:sp>
-      <p:sp>
-        <p:nvSpPr>
-          <p:cNvPr id="4" name="TextBox 3"/>
-          <p:cNvSpPr txBox="1"/>
-          <p:nvPr/>
-        </p:nvSpPr>
-        <p:spPr>
-          <a:xfrm>
-            <a:off x="594360" y="3529584"/>
-            <a:ext cx="11002975" cy="685800"/>
-          </a:xfrm>
-          <a:prstGeom prst="rect">
-            <a:avLst/>
-          </a:prstGeom>
-          <a:noFill/>
-        </p:spPr>
-        <p:txBody>
-          <a:bodyPr wrap="square">
-            <a:spAutoFit/>
-          </a:bodyPr>
-          <a:lstStyle/>
-          <a:p>
-            <a:pPr algn="ctr"/>
-            <a:r>
-              <a:rPr sz="4400" b="1" i="0">
+              <a:rPr sz="4800" b="1" i="0">
                 <a:solidFill>
                   <a:srgbClr val="FFFFFF"/>
                 </a:solidFill>
                 <a:latin typeface="Arial"/>
               </a:rPr>
               <a:t>Bendito seja o Teu nome</a:t>
-            </a:r>
-          </a:p>
-        </p:txBody>
-      </p:sp>
-      <p:sp>
-        <p:nvSpPr>
-          <p:cNvPr id="5" name="TextBox 4"/>
-          <p:cNvSpPr txBox="1"/>
-          <p:nvPr/>
-        </p:nvSpPr>
-        <p:spPr>
-          <a:xfrm>
-            <a:off x="594360" y="4251960"/>
-            <a:ext cx="11002975" cy="347472"/>
-          </a:xfrm>
-          <a:prstGeom prst="rect">
-            <a:avLst/>
-          </a:prstGeom>
-          <a:noFill/>
-        </p:spPr>
-        <p:txBody>
-          <a:bodyPr wrap="square">
-            <a:spAutoFit/>
-          </a:bodyPr>
-          <a:lstStyle/>
-          <a:p>
-            <a:pPr algn="ctr"/>
-            <a:r>
-              <a:rPr sz="2200" b="0" i="1">
-                <a:solidFill>
-                  <a:srgbClr val="8C8C8C"/>
-                </a:solidFill>
-                <a:latin typeface="Arial"/>
-              </a:rPr>
-              <a:t/>
             </a:r>
           </a:p>
         </p:txBody>

--- a/output_pptx/Blessed_Be_Your_Name.pptx
+++ b/output_pptx/Blessed_Be_Your_Name.pptx
@@ -3186,6 +3186,76 @@
           </a:p>
         </p:txBody>
       </p:sp>
+      <p:sp>
+        <p:nvSpPr>
+          <p:cNvPr id="4" name="TextBox 3"/>
+          <p:cNvSpPr txBox="1"/>
+          <p:nvPr/>
+        </p:nvSpPr>
+        <p:spPr>
+          <a:xfrm>
+            <a:off x="640080" y="4128516"/>
+            <a:ext cx="10911535" cy="310896"/>
+          </a:xfrm>
+          <a:prstGeom prst="rect">
+            <a:avLst/>
+          </a:prstGeom>
+          <a:noFill/>
+        </p:spPr>
+        <p:txBody>
+          <a:bodyPr wrap="square">
+            <a:spAutoFit/>
+          </a:bodyPr>
+          <a:lstStyle/>
+          <a:p>
+            <a:pPr algn="ctr"/>
+            <a:r>
+              <a:rPr sz="2000" b="0" i="0">
+                <a:solidFill>
+                  <a:srgbClr val="828282"/>
+                </a:solidFill>
+                <a:latin typeface="Arial"/>
+              </a:rPr>
+              <a:t>あなたの御名があがめられますように</a:t>
+            </a:r>
+          </a:p>
+        </p:txBody>
+      </p:sp>
+      <p:sp>
+        <p:nvSpPr>
+          <p:cNvPr id="5" name="TextBox 4"/>
+          <p:cNvSpPr txBox="1"/>
+          <p:nvPr/>
+        </p:nvSpPr>
+        <p:spPr>
+          <a:xfrm>
+            <a:off x="640080" y="4494276"/>
+            <a:ext cx="10911535" cy="310896"/>
+          </a:xfrm>
+          <a:prstGeom prst="rect">
+            <a:avLst/>
+          </a:prstGeom>
+          <a:noFill/>
+        </p:spPr>
+        <p:txBody>
+          <a:bodyPr wrap="square">
+            <a:spAutoFit/>
+          </a:bodyPr>
+          <a:lstStyle/>
+          <a:p>
+            <a:pPr algn="ctr"/>
+            <a:r>
+              <a:rPr sz="2000" b="0" i="0">
+                <a:solidFill>
+                  <a:srgbClr val="828282"/>
+                </a:solidFill>
+                <a:latin typeface="Arial"/>
+              </a:rPr>
+              <a:t>あなたの御名があがめられますように</a:t>
+            </a:r>
+          </a:p>
+        </p:txBody>
+      </p:sp>
     </p:spTree>
   </p:cSld>
   <p:clrMapOvr>
@@ -3282,6 +3352,76 @@
           </a:p>
         </p:txBody>
       </p:sp>
+      <p:sp>
+        <p:nvSpPr>
+          <p:cNvPr id="4" name="TextBox 3"/>
+          <p:cNvSpPr txBox="1"/>
+          <p:nvPr/>
+        </p:nvSpPr>
+        <p:spPr>
+          <a:xfrm>
+            <a:off x="640080" y="4128516"/>
+            <a:ext cx="10911535" cy="310896"/>
+          </a:xfrm>
+          <a:prstGeom prst="rect">
+            <a:avLst/>
+          </a:prstGeom>
+          <a:noFill/>
+        </p:spPr>
+        <p:txBody>
+          <a:bodyPr wrap="square">
+            <a:spAutoFit/>
+          </a:bodyPr>
+          <a:lstStyle/>
+          <a:p>
+            <a:pPr algn="ctr"/>
+            <a:r>
+              <a:rPr sz="2000" b="0" i="0">
+                <a:solidFill>
+                  <a:srgbClr val="828282"/>
+                </a:solidFill>
+                <a:latin typeface="Arial"/>
+              </a:rPr>
+              <a:t>あなたの御名があがめられますように</a:t>
+            </a:r>
+          </a:p>
+        </p:txBody>
+      </p:sp>
+      <p:sp>
+        <p:nvSpPr>
+          <p:cNvPr id="5" name="TextBox 4"/>
+          <p:cNvSpPr txBox="1"/>
+          <p:nvPr/>
+        </p:nvSpPr>
+        <p:spPr>
+          <a:xfrm>
+            <a:off x="640080" y="4494276"/>
+            <a:ext cx="10911535" cy="310896"/>
+          </a:xfrm>
+          <a:prstGeom prst="rect">
+            <a:avLst/>
+          </a:prstGeom>
+          <a:noFill/>
+        </p:spPr>
+        <p:txBody>
+          <a:bodyPr wrap="square">
+            <a:spAutoFit/>
+          </a:bodyPr>
+          <a:lstStyle/>
+          <a:p>
+            <a:pPr algn="ctr"/>
+            <a:r>
+              <a:rPr sz="2000" b="0" i="0">
+                <a:solidFill>
+                  <a:srgbClr val="828282"/>
+                </a:solidFill>
+                <a:latin typeface="Arial"/>
+              </a:rPr>
+              <a:t>あなたの御名があがめられますように</a:t>
+            </a:r>
+          </a:p>
+        </p:txBody>
+      </p:sp>
     </p:spTree>
   </p:cSld>
   <p:clrMapOvr>
@@ -4322,6 +4462,76 @@
           </a:p>
         </p:txBody>
       </p:sp>
+      <p:sp>
+        <p:nvSpPr>
+          <p:cNvPr id="4" name="TextBox 3"/>
+          <p:cNvSpPr txBox="1"/>
+          <p:nvPr/>
+        </p:nvSpPr>
+        <p:spPr>
+          <a:xfrm>
+            <a:off x="640080" y="4128516"/>
+            <a:ext cx="10911535" cy="310896"/>
+          </a:xfrm>
+          <a:prstGeom prst="rect">
+            <a:avLst/>
+          </a:prstGeom>
+          <a:noFill/>
+        </p:spPr>
+        <p:txBody>
+          <a:bodyPr wrap="square">
+            <a:spAutoFit/>
+          </a:bodyPr>
+          <a:lstStyle/>
+          <a:p>
+            <a:pPr algn="ctr"/>
+            <a:r>
+              <a:rPr sz="2000" b="0" i="0">
+                <a:solidFill>
+                  <a:srgbClr val="828282"/>
+                </a:solidFill>
+                <a:latin typeface="Arial"/>
+              </a:rPr>
+              <a:t>あなたの栄光ある御名があがめられますように</a:t>
+            </a:r>
+          </a:p>
+        </p:txBody>
+      </p:sp>
+      <p:sp>
+        <p:nvSpPr>
+          <p:cNvPr id="5" name="TextBox 4"/>
+          <p:cNvSpPr txBox="1"/>
+          <p:nvPr/>
+        </p:nvSpPr>
+        <p:spPr>
+          <a:xfrm>
+            <a:off x="640080" y="4494276"/>
+            <a:ext cx="10911535" cy="310896"/>
+          </a:xfrm>
+          <a:prstGeom prst="rect">
+            <a:avLst/>
+          </a:prstGeom>
+          <a:noFill/>
+        </p:spPr>
+        <p:txBody>
+          <a:bodyPr wrap="square">
+            <a:spAutoFit/>
+          </a:bodyPr>
+          <a:lstStyle/>
+          <a:p>
+            <a:pPr algn="ctr"/>
+            <a:r>
+              <a:rPr sz="2000" b="0" i="0">
+                <a:solidFill>
+                  <a:srgbClr val="828282"/>
+                </a:solidFill>
+                <a:latin typeface="Arial"/>
+              </a:rPr>
+              <a:t>あなたは与え、あなたは取られます</a:t>
+            </a:r>
+          </a:p>
+        </p:txBody>
+      </p:sp>
     </p:spTree>
   </p:cSld>
   <p:clrMapOvr>
@@ -4418,6 +4628,76 @@
           </a:p>
         </p:txBody>
       </p:sp>
+      <p:sp>
+        <p:nvSpPr>
+          <p:cNvPr id="4" name="TextBox 3"/>
+          <p:cNvSpPr txBox="1"/>
+          <p:nvPr/>
+        </p:nvSpPr>
+        <p:spPr>
+          <a:xfrm>
+            <a:off x="640080" y="4128516"/>
+            <a:ext cx="10911535" cy="310896"/>
+          </a:xfrm>
+          <a:prstGeom prst="rect">
+            <a:avLst/>
+          </a:prstGeom>
+          <a:noFill/>
+        </p:spPr>
+        <p:txBody>
+          <a:bodyPr wrap="square">
+            <a:spAutoFit/>
+          </a:bodyPr>
+          <a:lstStyle/>
+          <a:p>
+            <a:pPr algn="ctr"/>
+            <a:r>
+              <a:rPr sz="2000" b="0" i="0">
+                <a:solidFill>
+                  <a:srgbClr val="828282"/>
+                </a:solidFill>
+                <a:latin typeface="Arial"/>
+              </a:rPr>
+              <a:t>あなたは与え、あなたは取られます</a:t>
+            </a:r>
+          </a:p>
+        </p:txBody>
+      </p:sp>
+      <p:sp>
+        <p:nvSpPr>
+          <p:cNvPr id="5" name="TextBox 4"/>
+          <p:cNvSpPr txBox="1"/>
+          <p:nvPr/>
+        </p:nvSpPr>
+        <p:spPr>
+          <a:xfrm>
+            <a:off x="640080" y="4494276"/>
+            <a:ext cx="10911535" cy="310896"/>
+          </a:xfrm>
+          <a:prstGeom prst="rect">
+            <a:avLst/>
+          </a:prstGeom>
+          <a:noFill/>
+        </p:spPr>
+        <p:txBody>
+          <a:bodyPr wrap="square">
+            <a:spAutoFit/>
+          </a:bodyPr>
+          <a:lstStyle/>
+          <a:p>
+            <a:pPr algn="ctr"/>
+            <a:r>
+              <a:rPr sz="2000" b="0" i="0">
+                <a:solidFill>
+                  <a:srgbClr val="828282"/>
+                </a:solidFill>
+                <a:latin typeface="Arial"/>
+              </a:rPr>
+              <a:t>私の心は言うことを選びます</a:t>
+            </a:r>
+          </a:p>
+        </p:txBody>
+      </p:sp>
     </p:spTree>
   </p:cSld>
   <p:clrMapOvr>
@@ -4514,6 +4794,76 @@
           </a:p>
         </p:txBody>
       </p:sp>
+      <p:sp>
+        <p:nvSpPr>
+          <p:cNvPr id="4" name="TextBox 3"/>
+          <p:cNvSpPr txBox="1"/>
+          <p:nvPr/>
+        </p:nvSpPr>
+        <p:spPr>
+          <a:xfrm>
+            <a:off x="640080" y="4128516"/>
+            <a:ext cx="10911535" cy="310896"/>
+          </a:xfrm>
+          <a:prstGeom prst="rect">
+            <a:avLst/>
+          </a:prstGeom>
+          <a:noFill/>
+        </p:spPr>
+        <p:txBody>
+          <a:bodyPr wrap="square">
+            <a:spAutoFit/>
+          </a:bodyPr>
+          <a:lstStyle/>
+          <a:p>
+            <a:pPr algn="ctr"/>
+            <a:r>
+              <a:rPr sz="2000" b="0" i="0">
+                <a:solidFill>
+                  <a:srgbClr val="828282"/>
+                </a:solidFill>
+                <a:latin typeface="Arial"/>
+              </a:rPr>
+              <a:t>なおも私は言います</a:t>
+            </a:r>
+          </a:p>
+        </p:txBody>
+      </p:sp>
+      <p:sp>
+        <p:nvSpPr>
+          <p:cNvPr id="5" name="TextBox 4"/>
+          <p:cNvSpPr txBox="1"/>
+          <p:nvPr/>
+        </p:nvSpPr>
+        <p:spPr>
+          <a:xfrm>
+            <a:off x="640080" y="4494276"/>
+            <a:ext cx="10911535" cy="310896"/>
+          </a:xfrm>
+          <a:prstGeom prst="rect">
+            <a:avLst/>
+          </a:prstGeom>
+          <a:noFill/>
+        </p:spPr>
+        <p:txBody>
+          <a:bodyPr wrap="square">
+            <a:spAutoFit/>
+          </a:bodyPr>
+          <a:lstStyle/>
+          <a:p>
+            <a:pPr algn="ctr"/>
+            <a:r>
+              <a:rPr sz="2000" b="0" i="0">
+                <a:solidFill>
+                  <a:srgbClr val="828282"/>
+                </a:solidFill>
+                <a:latin typeface="Arial"/>
+              </a:rPr>
+              <a:t>主の御名があがめられますように</a:t>
+            </a:r>
+          </a:p>
+        </p:txBody>
+      </p:sp>
     </p:spTree>
   </p:cSld>
   <p:clrMapOvr>
@@ -4610,6 +4960,76 @@
           </a:p>
         </p:txBody>
       </p:sp>
+      <p:sp>
+        <p:nvSpPr>
+          <p:cNvPr id="4" name="TextBox 3"/>
+          <p:cNvSpPr txBox="1"/>
+          <p:nvPr/>
+        </p:nvSpPr>
+        <p:spPr>
+          <a:xfrm>
+            <a:off x="640080" y="4128516"/>
+            <a:ext cx="10911535" cy="310896"/>
+          </a:xfrm>
+          <a:prstGeom prst="rect">
+            <a:avLst/>
+          </a:prstGeom>
+          <a:noFill/>
+        </p:spPr>
+        <p:txBody>
+          <a:bodyPr wrap="square">
+            <a:spAutoFit/>
+          </a:bodyPr>
+          <a:lstStyle/>
+          <a:p>
+            <a:pPr algn="ctr"/>
+            <a:r>
+              <a:rPr sz="2000" b="0" i="0">
+                <a:solidFill>
+                  <a:srgbClr val="828282"/>
+                </a:solidFill>
+                <a:latin typeface="Arial"/>
+              </a:rPr>
+              <a:t>あなたの御名があがめられますように</a:t>
+            </a:r>
+          </a:p>
+        </p:txBody>
+      </p:sp>
+      <p:sp>
+        <p:nvSpPr>
+          <p:cNvPr id="5" name="TextBox 4"/>
+          <p:cNvSpPr txBox="1"/>
+          <p:nvPr/>
+        </p:nvSpPr>
+        <p:spPr>
+          <a:xfrm>
+            <a:off x="640080" y="4494276"/>
+            <a:ext cx="10911535" cy="310896"/>
+          </a:xfrm>
+          <a:prstGeom prst="rect">
+            <a:avLst/>
+          </a:prstGeom>
+          <a:noFill/>
+        </p:spPr>
+        <p:txBody>
+          <a:bodyPr wrap="square">
+            <a:spAutoFit/>
+          </a:bodyPr>
+          <a:lstStyle/>
+          <a:p>
+            <a:pPr algn="ctr"/>
+            <a:r>
+              <a:rPr sz="2000" b="0" i="0">
+                <a:solidFill>
+                  <a:srgbClr val="828282"/>
+                </a:solidFill>
+                <a:latin typeface="Arial"/>
+              </a:rPr>
+              <a:t>主の御名があがめられますように</a:t>
+            </a:r>
+          </a:p>
+        </p:txBody>
+      </p:sp>
     </p:spTree>
   </p:cSld>
   <p:clrMapOvr>
@@ -4706,6 +5126,76 @@
           </a:p>
         </p:txBody>
       </p:sp>
+      <p:sp>
+        <p:nvSpPr>
+          <p:cNvPr id="4" name="TextBox 3"/>
+          <p:cNvSpPr txBox="1"/>
+          <p:nvPr/>
+        </p:nvSpPr>
+        <p:spPr>
+          <a:xfrm>
+            <a:off x="640080" y="4128516"/>
+            <a:ext cx="10911535" cy="310896"/>
+          </a:xfrm>
+          <a:prstGeom prst="rect">
+            <a:avLst/>
+          </a:prstGeom>
+          <a:noFill/>
+        </p:spPr>
+        <p:txBody>
+          <a:bodyPr wrap="square">
+            <a:spAutoFit/>
+          </a:bodyPr>
+          <a:lstStyle/>
+          <a:p>
+            <a:pPr algn="ctr"/>
+            <a:r>
+              <a:rPr sz="2000" b="0" i="0">
+                <a:solidFill>
+                  <a:srgbClr val="828282"/>
+                </a:solidFill>
+                <a:latin typeface="Arial"/>
+              </a:rPr>
+              <a:t>あなたの御名があがめられますように</a:t>
+            </a:r>
+          </a:p>
+        </p:txBody>
+      </p:sp>
+      <p:sp>
+        <p:nvSpPr>
+          <p:cNvPr id="5" name="TextBox 4"/>
+          <p:cNvSpPr txBox="1"/>
+          <p:nvPr/>
+        </p:nvSpPr>
+        <p:spPr>
+          <a:xfrm>
+            <a:off x="640080" y="4494276"/>
+            <a:ext cx="10911535" cy="310896"/>
+          </a:xfrm>
+          <a:prstGeom prst="rect">
+            <a:avLst/>
+          </a:prstGeom>
+          <a:noFill/>
+        </p:spPr>
+        <p:txBody>
+          <a:bodyPr wrap="square">
+            <a:spAutoFit/>
+          </a:bodyPr>
+          <a:lstStyle/>
+          <a:p>
+            <a:pPr algn="ctr"/>
+            <a:r>
+              <a:rPr sz="2000" b="0" i="0">
+                <a:solidFill>
+                  <a:srgbClr val="828282"/>
+                </a:solidFill>
+                <a:latin typeface="Arial"/>
+              </a:rPr>
+              <a:t>あなたの御名があがめられますように</a:t>
+            </a:r>
+          </a:p>
+        </p:txBody>
+      </p:sp>
     </p:spTree>
   </p:cSld>
   <p:clrMapOvr>
@@ -4802,6 +5292,76 @@
           </a:p>
         </p:txBody>
       </p:sp>
+      <p:sp>
+        <p:nvSpPr>
+          <p:cNvPr id="4" name="TextBox 3"/>
+          <p:cNvSpPr txBox="1"/>
+          <p:nvPr/>
+        </p:nvSpPr>
+        <p:spPr>
+          <a:xfrm>
+            <a:off x="640080" y="4128516"/>
+            <a:ext cx="10911535" cy="310896"/>
+          </a:xfrm>
+          <a:prstGeom prst="rect">
+            <a:avLst/>
+          </a:prstGeom>
+          <a:noFill/>
+        </p:spPr>
+        <p:txBody>
+          <a:bodyPr wrap="square">
+            <a:spAutoFit/>
+          </a:bodyPr>
+          <a:lstStyle/>
+          <a:p>
+            <a:pPr algn="ctr"/>
+            <a:r>
+              <a:rPr sz="2000" b="0" i="0">
+                <a:solidFill>
+                  <a:srgbClr val="828282"/>
+                </a:solidFill>
+                <a:latin typeface="Arial"/>
+              </a:rPr>
+              <a:t>豊かな地で</a:t>
+            </a:r>
+          </a:p>
+        </p:txBody>
+      </p:sp>
+      <p:sp>
+        <p:nvSpPr>
+          <p:cNvPr id="5" name="TextBox 4"/>
+          <p:cNvSpPr txBox="1"/>
+          <p:nvPr/>
+        </p:nvSpPr>
+        <p:spPr>
+          <a:xfrm>
+            <a:off x="640080" y="4494276"/>
+            <a:ext cx="10911535" cy="310896"/>
+          </a:xfrm>
+          <a:prstGeom prst="rect">
+            <a:avLst/>
+          </a:prstGeom>
+          <a:noFill/>
+        </p:spPr>
+        <p:txBody>
+          <a:bodyPr wrap="square">
+            <a:spAutoFit/>
+          </a:bodyPr>
+          <a:lstStyle/>
+          <a:p>
+            <a:pPr algn="ctr"/>
+            <a:r>
+              <a:rPr sz="2000" b="0" i="0">
+                <a:solidFill>
+                  <a:srgbClr val="828282"/>
+                </a:solidFill>
+                <a:latin typeface="Arial"/>
+              </a:rPr>
+              <a:t>あなたの恵みの流れが注ぎ出されるところで</a:t>
+            </a:r>
+          </a:p>
+        </p:txBody>
+      </p:sp>
     </p:spTree>
   </p:cSld>
   <p:clrMapOvr>
@@ -4898,6 +5458,76 @@
           </a:p>
         </p:txBody>
       </p:sp>
+      <p:sp>
+        <p:nvSpPr>
+          <p:cNvPr id="4" name="TextBox 3"/>
+          <p:cNvSpPr txBox="1"/>
+          <p:nvPr/>
+        </p:nvSpPr>
+        <p:spPr>
+          <a:xfrm>
+            <a:off x="640080" y="4128516"/>
+            <a:ext cx="10911535" cy="310896"/>
+          </a:xfrm>
+          <a:prstGeom prst="rect">
+            <a:avLst/>
+          </a:prstGeom>
+          <a:noFill/>
+        </p:spPr>
+        <p:txBody>
+          <a:bodyPr wrap="square">
+            <a:spAutoFit/>
+          </a:bodyPr>
+          <a:lstStyle/>
+          <a:p>
+            <a:pPr algn="ctr"/>
+            <a:r>
+              <a:rPr sz="2000" b="0" i="0">
+                <a:solidFill>
+                  <a:srgbClr val="828282"/>
+                </a:solidFill>
+                <a:latin typeface="Arial"/>
+              </a:rPr>
+              <a:t>あなたの御名があがめられますように</a:t>
+            </a:r>
+          </a:p>
+        </p:txBody>
+      </p:sp>
+      <p:sp>
+        <p:nvSpPr>
+          <p:cNvPr id="5" name="TextBox 4"/>
+          <p:cNvSpPr txBox="1"/>
+          <p:nvPr/>
+        </p:nvSpPr>
+        <p:spPr>
+          <a:xfrm>
+            <a:off x="640080" y="4494276"/>
+            <a:ext cx="10911535" cy="310896"/>
+          </a:xfrm>
+          <a:prstGeom prst="rect">
+            <a:avLst/>
+          </a:prstGeom>
+          <a:noFill/>
+        </p:spPr>
+        <p:txBody>
+          <a:bodyPr wrap="square">
+            <a:spAutoFit/>
+          </a:bodyPr>
+          <a:lstStyle/>
+          <a:p>
+            <a:pPr algn="ctr"/>
+            <a:r>
+              <a:rPr sz="2000" b="0" i="0">
+                <a:solidFill>
+                  <a:srgbClr val="828282"/>
+                </a:solidFill>
+                <a:latin typeface="Arial"/>
+              </a:rPr>
+              <a:t>あなたの御名があがめられますように</a:t>
+            </a:r>
+          </a:p>
+        </p:txBody>
+      </p:sp>
     </p:spTree>
   </p:cSld>
   <p:clrMapOvr>
@@ -5230,6 +5860,76 @@
           </a:p>
         </p:txBody>
       </p:sp>
+      <p:sp>
+        <p:nvSpPr>
+          <p:cNvPr id="4" name="TextBox 3"/>
+          <p:cNvSpPr txBox="1"/>
+          <p:nvPr/>
+        </p:nvSpPr>
+        <p:spPr>
+          <a:xfrm>
+            <a:off x="640080" y="4128516"/>
+            <a:ext cx="10911535" cy="310896"/>
+          </a:xfrm>
+          <a:prstGeom prst="rect">
+            <a:avLst/>
+          </a:prstGeom>
+          <a:noFill/>
+        </p:spPr>
+        <p:txBody>
+          <a:bodyPr wrap="square">
+            <a:spAutoFit/>
+          </a:bodyPr>
+          <a:lstStyle/>
+          <a:p>
+            <a:pPr algn="ctr"/>
+            <a:r>
+              <a:rPr sz="2000" b="0" i="0">
+                <a:solidFill>
+                  <a:srgbClr val="828282"/>
+                </a:solidFill>
+                <a:latin typeface="Arial"/>
+              </a:rPr>
+              <a:t>あなたの御名があがめられますように</a:t>
+            </a:r>
+          </a:p>
+        </p:txBody>
+      </p:sp>
+      <p:sp>
+        <p:nvSpPr>
+          <p:cNvPr id="5" name="TextBox 4"/>
+          <p:cNvSpPr txBox="1"/>
+          <p:nvPr/>
+        </p:nvSpPr>
+        <p:spPr>
+          <a:xfrm>
+            <a:off x="640080" y="4494276"/>
+            <a:ext cx="10911535" cy="310896"/>
+          </a:xfrm>
+          <a:prstGeom prst="rect">
+            <a:avLst/>
+          </a:prstGeom>
+          <a:noFill/>
+        </p:spPr>
+        <p:txBody>
+          <a:bodyPr wrap="square">
+            <a:spAutoFit/>
+          </a:bodyPr>
+          <a:lstStyle/>
+          <a:p>
+            <a:pPr algn="ctr"/>
+            <a:r>
+              <a:rPr sz="2000" b="0" i="0">
+                <a:solidFill>
+                  <a:srgbClr val="828282"/>
+                </a:solidFill>
+                <a:latin typeface="Arial"/>
+              </a:rPr>
+              <a:t>あなたの御名があがめられますように</a:t>
+            </a:r>
+          </a:p>
+        </p:txBody>
+      </p:sp>
     </p:spTree>
   </p:cSld>
   <p:clrMapOvr>
@@ -5326,6 +6026,76 @@
           </a:p>
         </p:txBody>
       </p:sp>
+      <p:sp>
+        <p:nvSpPr>
+          <p:cNvPr id="4" name="TextBox 3"/>
+          <p:cNvSpPr txBox="1"/>
+          <p:nvPr/>
+        </p:nvSpPr>
+        <p:spPr>
+          <a:xfrm>
+            <a:off x="640080" y="4128516"/>
+            <a:ext cx="10911535" cy="310896"/>
+          </a:xfrm>
+          <a:prstGeom prst="rect">
+            <a:avLst/>
+          </a:prstGeom>
+          <a:noFill/>
+        </p:spPr>
+        <p:txBody>
+          <a:bodyPr wrap="square">
+            <a:spAutoFit/>
+          </a:bodyPr>
+          <a:lstStyle/>
+          <a:p>
+            <a:pPr algn="ctr"/>
+            <a:r>
+              <a:rPr sz="2000" b="0" i="0">
+                <a:solidFill>
+                  <a:srgbClr val="828282"/>
+                </a:solidFill>
+                <a:latin typeface="Arial"/>
+              </a:rPr>
+              <a:t>私が荒野の地にいるとき</a:t>
+            </a:r>
+          </a:p>
+        </p:txBody>
+      </p:sp>
+      <p:sp>
+        <p:nvSpPr>
+          <p:cNvPr id="5" name="TextBox 4"/>
+          <p:cNvSpPr txBox="1"/>
+          <p:nvPr/>
+        </p:nvSpPr>
+        <p:spPr>
+          <a:xfrm>
+            <a:off x="640080" y="4494276"/>
+            <a:ext cx="10911535" cy="310896"/>
+          </a:xfrm>
+          <a:prstGeom prst="rect">
+            <a:avLst/>
+          </a:prstGeom>
+          <a:noFill/>
+        </p:spPr>
+        <p:txBody>
+          <a:bodyPr wrap="square">
+            <a:spAutoFit/>
+          </a:bodyPr>
+          <a:lstStyle/>
+          <a:p>
+            <a:pPr algn="ctr"/>
+            <a:r>
+              <a:rPr sz="2000" b="0" i="0">
+                <a:solidFill>
+                  <a:srgbClr val="828282"/>
+                </a:solidFill>
+                <a:latin typeface="Arial"/>
+              </a:rPr>
+              <a:t>たとえ私が荒野を歩むとしても</a:t>
+            </a:r>
+          </a:p>
+        </p:txBody>
+      </p:sp>
     </p:spTree>
   </p:cSld>
   <p:clrMapOvr>
@@ -5422,6 +6192,76 @@
           </a:p>
         </p:txBody>
       </p:sp>
+      <p:sp>
+        <p:nvSpPr>
+          <p:cNvPr id="4" name="TextBox 3"/>
+          <p:cNvSpPr txBox="1"/>
+          <p:nvPr/>
+        </p:nvSpPr>
+        <p:spPr>
+          <a:xfrm>
+            <a:off x="640080" y="4128516"/>
+            <a:ext cx="10911535" cy="310896"/>
+          </a:xfrm>
+          <a:prstGeom prst="rect">
+            <a:avLst/>
+          </a:prstGeom>
+          <a:noFill/>
+        </p:spPr>
+        <p:txBody>
+          <a:bodyPr wrap="square">
+            <a:spAutoFit/>
+          </a:bodyPr>
+          <a:lstStyle/>
+          <a:p>
+            <a:pPr algn="ctr"/>
+            <a:r>
+              <a:rPr sz="2000" b="0" i="0">
+                <a:solidFill>
+                  <a:srgbClr val="828282"/>
+                </a:solidFill>
+                <a:latin typeface="Arial"/>
+              </a:rPr>
+              <a:t>あなたの御名があがめられますように</a:t>
+            </a:r>
+          </a:p>
+        </p:txBody>
+      </p:sp>
+      <p:sp>
+        <p:nvSpPr>
+          <p:cNvPr id="5" name="TextBox 4"/>
+          <p:cNvSpPr txBox="1"/>
+          <p:nvPr/>
+        </p:nvSpPr>
+        <p:spPr>
+          <a:xfrm>
+            <a:off x="640080" y="4494276"/>
+            <a:ext cx="10911535" cy="310896"/>
+          </a:xfrm>
+          <a:prstGeom prst="rect">
+            <a:avLst/>
+          </a:prstGeom>
+          <a:noFill/>
+        </p:spPr>
+        <p:txBody>
+          <a:bodyPr wrap="square">
+            <a:spAutoFit/>
+          </a:bodyPr>
+          <a:lstStyle/>
+          <a:p>
+            <a:pPr algn="ctr"/>
+            <a:r>
+              <a:rPr sz="2000" b="0" i="0">
+                <a:solidFill>
+                  <a:srgbClr val="828282"/>
+                </a:solidFill>
+                <a:latin typeface="Arial"/>
+              </a:rPr>
+              <a:t>あなたが注ぎ出すすべての祝福</a:t>
+            </a:r>
+          </a:p>
+        </p:txBody>
+      </p:sp>
     </p:spTree>
   </p:cSld>
   <p:clrMapOvr>
@@ -5518,6 +6358,76 @@
           </a:p>
         </p:txBody>
       </p:sp>
+      <p:sp>
+        <p:nvSpPr>
+          <p:cNvPr id="4" name="TextBox 3"/>
+          <p:cNvSpPr txBox="1"/>
+          <p:nvPr/>
+        </p:nvSpPr>
+        <p:spPr>
+          <a:xfrm>
+            <a:off x="640080" y="4128516"/>
+            <a:ext cx="10911535" cy="310896"/>
+          </a:xfrm>
+          <a:prstGeom prst="rect">
+            <a:avLst/>
+          </a:prstGeom>
+          <a:noFill/>
+        </p:spPr>
+        <p:txBody>
+          <a:bodyPr wrap="square">
+            <a:spAutoFit/>
+          </a:bodyPr>
+          <a:lstStyle/>
+          <a:p>
+            <a:pPr algn="ctr"/>
+            <a:r>
+              <a:rPr sz="2000" b="0" i="0">
+                <a:solidFill>
+                  <a:srgbClr val="828282"/>
+                </a:solidFill>
+                <a:latin typeface="Arial"/>
+              </a:rPr>
+              <a:t>私は賛美をもって返します</a:t>
+            </a:r>
+          </a:p>
+        </p:txBody>
+      </p:sp>
+      <p:sp>
+        <p:nvSpPr>
+          <p:cNvPr id="5" name="TextBox 4"/>
+          <p:cNvSpPr txBox="1"/>
+          <p:nvPr/>
+        </p:nvSpPr>
+        <p:spPr>
+          <a:xfrm>
+            <a:off x="640080" y="4494276"/>
+            <a:ext cx="10911535" cy="310896"/>
+          </a:xfrm>
+          <a:prstGeom prst="rect">
+            <a:avLst/>
+          </a:prstGeom>
+          <a:noFill/>
+        </p:spPr>
+        <p:txBody>
+          <a:bodyPr wrap="square">
+            <a:spAutoFit/>
+          </a:bodyPr>
+          <a:lstStyle/>
+          <a:p>
+            <a:pPr algn="ctr"/>
+            <a:r>
+              <a:rPr sz="2000" b="0" i="0">
+                <a:solidFill>
+                  <a:srgbClr val="828282"/>
+                </a:solidFill>
+                <a:latin typeface="Arial"/>
+              </a:rPr>
+              <a:t>そして暗闇が私を包むとき、主よ</a:t>
+            </a:r>
+          </a:p>
+        </p:txBody>
+      </p:sp>
     </p:spTree>
   </p:cSld>
   <p:clrMapOvr>
@@ -5614,6 +6524,76 @@
           </a:p>
         </p:txBody>
       </p:sp>
+      <p:sp>
+        <p:nvSpPr>
+          <p:cNvPr id="4" name="TextBox 3"/>
+          <p:cNvSpPr txBox="1"/>
+          <p:nvPr/>
+        </p:nvSpPr>
+        <p:spPr>
+          <a:xfrm>
+            <a:off x="640080" y="4128516"/>
+            <a:ext cx="10911535" cy="310896"/>
+          </a:xfrm>
+          <a:prstGeom prst="rect">
+            <a:avLst/>
+          </a:prstGeom>
+          <a:noFill/>
+        </p:spPr>
+        <p:txBody>
+          <a:bodyPr wrap="square">
+            <a:spAutoFit/>
+          </a:bodyPr>
+          <a:lstStyle/>
+          <a:p>
+            <a:pPr algn="ctr"/>
+            <a:r>
+              <a:rPr sz="2000" b="0" i="0">
+                <a:solidFill>
+                  <a:srgbClr val="828282"/>
+                </a:solidFill>
+                <a:latin typeface="Arial"/>
+              </a:rPr>
+              <a:t>なおも私は言います</a:t>
+            </a:r>
+          </a:p>
+        </p:txBody>
+      </p:sp>
+      <p:sp>
+        <p:nvSpPr>
+          <p:cNvPr id="5" name="TextBox 4"/>
+          <p:cNvSpPr txBox="1"/>
+          <p:nvPr/>
+        </p:nvSpPr>
+        <p:spPr>
+          <a:xfrm>
+            <a:off x="640080" y="4494276"/>
+            <a:ext cx="10911535" cy="310896"/>
+          </a:xfrm>
+          <a:prstGeom prst="rect">
+            <a:avLst/>
+          </a:prstGeom>
+          <a:noFill/>
+        </p:spPr>
+        <p:txBody>
+          <a:bodyPr wrap="square">
+            <a:spAutoFit/>
+          </a:bodyPr>
+          <a:lstStyle/>
+          <a:p>
+            <a:pPr algn="ctr"/>
+            <a:r>
+              <a:rPr sz="2000" b="0" i="0">
+                <a:solidFill>
+                  <a:srgbClr val="828282"/>
+                </a:solidFill>
+                <a:latin typeface="Arial"/>
+              </a:rPr>
+              <a:t>主の御名があがめられますように</a:t>
+            </a:r>
+          </a:p>
+        </p:txBody>
+      </p:sp>
     </p:spTree>
   </p:cSld>
   <p:clrMapOvr>
@@ -5710,6 +6690,76 @@
           </a:p>
         </p:txBody>
       </p:sp>
+      <p:sp>
+        <p:nvSpPr>
+          <p:cNvPr id="4" name="TextBox 3"/>
+          <p:cNvSpPr txBox="1"/>
+          <p:nvPr/>
+        </p:nvSpPr>
+        <p:spPr>
+          <a:xfrm>
+            <a:off x="640080" y="4128516"/>
+            <a:ext cx="10911535" cy="310896"/>
+          </a:xfrm>
+          <a:prstGeom prst="rect">
+            <a:avLst/>
+          </a:prstGeom>
+          <a:noFill/>
+        </p:spPr>
+        <p:txBody>
+          <a:bodyPr wrap="square">
+            <a:spAutoFit/>
+          </a:bodyPr>
+          <a:lstStyle/>
+          <a:p>
+            <a:pPr algn="ctr"/>
+            <a:r>
+              <a:rPr sz="2000" b="0" i="0">
+                <a:solidFill>
+                  <a:srgbClr val="828282"/>
+                </a:solidFill>
+                <a:latin typeface="Arial"/>
+              </a:rPr>
+              <a:t>あなたの御名があがめられますように</a:t>
+            </a:r>
+          </a:p>
+        </p:txBody>
+      </p:sp>
+      <p:sp>
+        <p:nvSpPr>
+          <p:cNvPr id="5" name="TextBox 4"/>
+          <p:cNvSpPr txBox="1"/>
+          <p:nvPr/>
+        </p:nvSpPr>
+        <p:spPr>
+          <a:xfrm>
+            <a:off x="640080" y="4494276"/>
+            <a:ext cx="10911535" cy="310896"/>
+          </a:xfrm>
+          <a:prstGeom prst="rect">
+            <a:avLst/>
+          </a:prstGeom>
+          <a:noFill/>
+        </p:spPr>
+        <p:txBody>
+          <a:bodyPr wrap="square">
+            <a:spAutoFit/>
+          </a:bodyPr>
+          <a:lstStyle/>
+          <a:p>
+            <a:pPr algn="ctr"/>
+            <a:r>
+              <a:rPr sz="2000" b="0" i="0">
+                <a:solidFill>
+                  <a:srgbClr val="828282"/>
+                </a:solidFill>
+                <a:latin typeface="Arial"/>
+              </a:rPr>
+              <a:t>主の御名があがめられますように</a:t>
+            </a:r>
+          </a:p>
+        </p:txBody>
+      </p:sp>
     </p:spTree>
   </p:cSld>
   <p:clrMapOvr>
@@ -5802,6 +6852,76 @@
                 <a:latin typeface="Arial"/>
               </a:rPr>
               <a:t>Bendito seja o Teu nome</a:t>
+            </a:r>
+          </a:p>
+        </p:txBody>
+      </p:sp>
+      <p:sp>
+        <p:nvSpPr>
+          <p:cNvPr id="4" name="TextBox 3"/>
+          <p:cNvSpPr txBox="1"/>
+          <p:nvPr/>
+        </p:nvSpPr>
+        <p:spPr>
+          <a:xfrm>
+            <a:off x="640080" y="4128516"/>
+            <a:ext cx="10911535" cy="310896"/>
+          </a:xfrm>
+          <a:prstGeom prst="rect">
+            <a:avLst/>
+          </a:prstGeom>
+          <a:noFill/>
+        </p:spPr>
+        <p:txBody>
+          <a:bodyPr wrap="square">
+            <a:spAutoFit/>
+          </a:bodyPr>
+          <a:lstStyle/>
+          <a:p>
+            <a:pPr algn="ctr"/>
+            <a:r>
+              <a:rPr sz="2000" b="0" i="0">
+                <a:solidFill>
+                  <a:srgbClr val="828282"/>
+                </a:solidFill>
+                <a:latin typeface="Arial"/>
+              </a:rPr>
+              <a:t>あなたの御名があがめられますように</a:t>
+            </a:r>
+          </a:p>
+        </p:txBody>
+      </p:sp>
+      <p:sp>
+        <p:nvSpPr>
+          <p:cNvPr id="5" name="TextBox 4"/>
+          <p:cNvSpPr txBox="1"/>
+          <p:nvPr/>
+        </p:nvSpPr>
+        <p:spPr>
+          <a:xfrm>
+            <a:off x="640080" y="4494276"/>
+            <a:ext cx="10911535" cy="310896"/>
+          </a:xfrm>
+          <a:prstGeom prst="rect">
+            <a:avLst/>
+          </a:prstGeom>
+          <a:noFill/>
+        </p:spPr>
+        <p:txBody>
+          <a:bodyPr wrap="square">
+            <a:spAutoFit/>
+          </a:bodyPr>
+          <a:lstStyle/>
+          <a:p>
+            <a:pPr algn="ctr"/>
+            <a:r>
+              <a:rPr sz="2000" b="0" i="0">
+                <a:solidFill>
+                  <a:srgbClr val="828282"/>
+                </a:solidFill>
+                <a:latin typeface="Arial"/>
+              </a:rPr>
+              <a:t>あなたの御名があがめられますように</a:t>
             </a:r>
           </a:p>
         </p:txBody>
